--- a/my_dir/doc_preview_samples/sample.pptx
+++ b/my_dir/doc_preview_samples/sample.pptx
@@ -6,8 +6,13 @@
   </p:sldMasterIdLst>
   <p:sldIdLst>
     <p:sldId id="256" r:id="rId7"/>
+    <p:sldId id="257" r:id="rId9"/>
+    <p:sldId id="258" r:id="rId10"/>
+    <p:sldId id="259" r:id="rId11"/>
+    <p:sldId id="260" r:id="rId12"/>
+    <p:sldId id="261" r:id="rId13"/>
   </p:sldIdLst>
-  <p:sldSz cx="9144000" cy="6858000" type="screen4x3"/>
+  <p:sldSz cx="12191695" cy="6858000" type="screen4x3"/>
   <p:notesSz cx="6858000" cy="9144000"/>
   <p:defaultTextStyle>
     <a:defPPr>
@@ -105,6 +110,920 @@
     </a:lvl9pPr>
   </p:defaultTextStyle>
 </p:presentation>
+</file>
+
+<file path=ppt/charts/chart1.xml><?xml version="1.0" encoding="utf-8"?>
+<c:chartSpace xmlns:c="http://schemas.openxmlformats.org/drawingml/2006/chart" xmlns:a="http://schemas.openxmlformats.org/drawingml/2006/main" xmlns:r="http://schemas.openxmlformats.org/officeDocument/2006/relationships">
+  <c:date1904 val="0"/>
+  <c:chart>
+    <c:title>
+      <c:tx>
+        <c:rich>
+          <a:bodyPr/>
+          <a:lstStyle/>
+          <a:p>
+            <a:r>
+              <a:t>协作 SaaS 市场规模（亿元）</a:t>
+            </a:r>
+          </a:p>
+        </c:rich>
+      </c:tx>
+      <c:layout/>
+      <c:overlay val="0"/>
+    </c:title>
+    <c:autoTitleDeleted val="0"/>
+    <c:plotArea>
+      <c:barChart>
+        <c:barDir val="col"/>
+        <c:grouping val="clustered"/>
+        <c:ser>
+          <c:idx val="0"/>
+          <c:order val="0"/>
+          <c:tx>
+            <c:strRef>
+              <c:f>Sheet1!$B$1</c:f>
+              <c:strCache>
+                <c:ptCount val="1"/>
+                <c:pt idx="0">
+                  <c:v>市场规模</c:v>
+                </c:pt>
+              </c:strCache>
+            </c:strRef>
+          </c:tx>
+          <c:spPr>
+            <a:solidFill>
+              <a:srgbClr val="1E2761"/>
+            </a:solidFill>
+          </c:spPr>
+          <c:cat>
+            <c:strRef>
+              <c:f>Sheet1!$A$2:$A$5</c:f>
+              <c:strCache>
+                <c:ptCount val="4"/>
+                <c:pt idx="0">
+                  <c:v>2023</c:v>
+                </c:pt>
+                <c:pt idx="1">
+                  <c:v>2024</c:v>
+                </c:pt>
+                <c:pt idx="2">
+                  <c:v>2025</c:v>
+                </c:pt>
+                <c:pt idx="3">
+                  <c:v>2026E</c:v>
+                </c:pt>
+              </c:strCache>
+            </c:strRef>
+          </c:cat>
+          <c:val>
+            <c:numRef>
+              <c:f>Sheet1!$B$2:$B$5</c:f>
+              <c:numCache>
+                <c:formatCode>General</c:formatCode>
+                <c:ptCount val="4"/>
+                <c:pt idx="0">
+                  <c:v>12.4</c:v>
+                </c:pt>
+                <c:pt idx="1">
+                  <c:v>18.6</c:v>
+                </c:pt>
+                <c:pt idx="2">
+                  <c:v>27.3</c:v>
+                </c:pt>
+                <c:pt idx="3">
+                  <c:v>41.2</c:v>
+                </c:pt>
+              </c:numCache>
+            </c:numRef>
+          </c:val>
+        </c:ser>
+        <c:dLbls>
+          <c:showLegendKey val="0"/>
+          <c:showVal val="1"/>
+          <c:showCatName val="0"/>
+          <c:showSerName val="0"/>
+          <c:showPercent val="0"/>
+          <c:showBubbleSize val="0"/>
+          <c:showLeaderLines val="1"/>
+        </c:dLbls>
+        <c:axId val="-2068027336"/>
+        <c:axId val="-2113994440"/>
+      </c:barChart>
+      <c:catAx>
+        <c:axId val="-2068027336"/>
+        <c:scaling>
+          <c:orientation val="minMax"/>
+        </c:scaling>
+        <c:delete val="0"/>
+        <c:axPos val="b"/>
+        <c:majorTickMark val="out"/>
+        <c:minorTickMark val="none"/>
+        <c:tickLblPos val="nextTo"/>
+        <c:crossAx val="-2113994440"/>
+        <c:crosses val="autoZero"/>
+        <c:auto val="1"/>
+        <c:lblAlgn val="ctr"/>
+        <c:lblOffset val="100"/>
+        <c:noMultiLvlLbl val="0"/>
+      </c:catAx>
+      <c:valAx>
+        <c:axId val="-2113994440"/>
+        <c:scaling/>
+        <c:delete val="0"/>
+        <c:axPos val="l"/>
+        <c:majorTickMark val="out"/>
+        <c:minorTickMark val="none"/>
+        <c:tickLblPos val="nextTo"/>
+        <c:crossAx val="-2068027336"/>
+        <c:crosses val="autoZero"/>
+      </c:valAx>
+    </c:plotArea>
+    <c:dispBlanksAs val="gap"/>
+  </c:chart>
+  <c:txPr>
+    <a:bodyPr/>
+    <a:lstStyle/>
+    <a:p>
+      <a:pPr>
+        <a:defRPr sz="1800"/>
+      </a:pPr>
+      <a:endParaRPr lang="en-US"/>
+    </a:p>
+  </c:txPr>
+  <c:externalData r:id="rId1">
+    <c:autoUpdate val="0"/>
+  </c:externalData>
+</c:chartSpace>
+</file>
+
+<file path=ppt/notesMasters/notesMaster1.xml><?xml version="1.0" encoding="utf-8"?>
+<p:notesMaster xmlns:a="http://schemas.openxmlformats.org/drawingml/2006/main" xmlns:p="http://schemas.openxmlformats.org/presentationml/2006/main" xmlns:r="http://schemas.openxmlformats.org/officeDocument/2006/relationships">
+  <p:cSld>
+    <p:bg>
+      <p:bgRef idx="1001">
+        <a:schemeClr val="bg1"/>
+      </p:bgRef>
+    </p:bg>
+    <p:spTree>
+      <p:nvGrpSpPr>
+        <p:cNvPr id="1" name=""/>
+        <p:cNvGrpSpPr/>
+        <p:nvPr/>
+      </p:nvGrpSpPr>
+      <p:grpSpPr>
+        <a:xfrm>
+          <a:off x="0" y="0"/>
+          <a:ext cx="0" cy="0"/>
+          <a:chOff x="0" y="0"/>
+          <a:chExt cx="0" cy="0"/>
+        </a:xfrm>
+      </p:grpSpPr>
+      <p:sp>
+        <p:nvSpPr>
+          <p:cNvPr id="2" name="Header Placeholder 1"/>
+          <p:cNvSpPr>
+            <a:spLocks noGrp="1"/>
+          </p:cNvSpPr>
+          <p:nvPr>
+            <p:ph type="hdr" sz="quarter"/>
+          </p:nvPr>
+        </p:nvSpPr>
+        <p:spPr>
+          <a:xfrm>
+            <a:off x="0" y="0"/>
+            <a:ext cx="2971800" cy="457200"/>
+          </a:xfrm>
+          <a:prstGeom prst="rect">
+            <a:avLst/>
+          </a:prstGeom>
+        </p:spPr>
+        <p:txBody>
+          <a:bodyPr vert="horz" lIns="91440" tIns="45720" rIns="91440" bIns="45720" rtlCol="0"/>
+          <a:lstStyle>
+            <a:lvl1pPr algn="l">
+              <a:defRPr sz="1200"/>
+            </a:lvl1pPr>
+          </a:lstStyle>
+          <a:p>
+            <a:endParaRPr lang="en-US"/>
+          </a:p>
+        </p:txBody>
+      </p:sp>
+      <p:sp>
+        <p:nvSpPr>
+          <p:cNvPr id="3" name="Date Placeholder 2"/>
+          <p:cNvSpPr>
+            <a:spLocks noGrp="1"/>
+          </p:cNvSpPr>
+          <p:nvPr>
+            <p:ph type="dt" idx="1"/>
+          </p:nvPr>
+        </p:nvSpPr>
+        <p:spPr>
+          <a:xfrm>
+            <a:off x="3884613" y="0"/>
+            <a:ext cx="2971800" cy="457200"/>
+          </a:xfrm>
+          <a:prstGeom prst="rect">
+            <a:avLst/>
+          </a:prstGeom>
+        </p:spPr>
+        <p:txBody>
+          <a:bodyPr vert="horz" lIns="91440" tIns="45720" rIns="91440" bIns="45720" rtlCol="0"/>
+          <a:lstStyle>
+            <a:lvl1pPr algn="r">
+              <a:defRPr sz="1200"/>
+            </a:lvl1pPr>
+          </a:lstStyle>
+          <a:p>
+            <a:fld id="{0F89C1C7-3DCD-1040-A9CF-14679D8B5DDD}" type="datetimeFigureOut">
+              <a:rPr lang="en-US" smtClean="0"/>
+              <a:t>10/17/16</a:t>
+            </a:fld>
+            <a:endParaRPr lang="en-US"/>
+          </a:p>
+        </p:txBody>
+      </p:sp>
+      <p:sp>
+        <p:nvSpPr>
+          <p:cNvPr id="4" name="Slide Image Placeholder 3"/>
+          <p:cNvSpPr>
+            <a:spLocks noGrp="1" noRot="1" noChangeAspect="1"/>
+          </p:cNvSpPr>
+          <p:nvPr>
+            <p:ph type="sldImg" idx="2"/>
+          </p:nvPr>
+        </p:nvSpPr>
+        <p:spPr>
+          <a:xfrm>
+            <a:off x="1143000" y="685800"/>
+            <a:ext cx="4572000" cy="3429000"/>
+          </a:xfrm>
+          <a:prstGeom prst="rect">
+            <a:avLst/>
+          </a:prstGeom>
+          <a:noFill/>
+          <a:ln w="12700">
+            <a:solidFill>
+              <a:prstClr val="black"/>
+            </a:solidFill>
+          </a:ln>
+        </p:spPr>
+        <p:txBody>
+          <a:bodyPr vert="horz" lIns="91440" tIns="45720" rIns="91440" bIns="45720" rtlCol="0" anchor="ctr"/>
+          <a:lstStyle/>
+          <a:p>
+            <a:endParaRPr lang="en-US"/>
+          </a:p>
+        </p:txBody>
+      </p:sp>
+      <p:sp>
+        <p:nvSpPr>
+          <p:cNvPr id="5" name="Notes Placeholder 4"/>
+          <p:cNvSpPr>
+            <a:spLocks noGrp="1"/>
+          </p:cNvSpPr>
+          <p:nvPr>
+            <p:ph type="body" sz="quarter" idx="3"/>
+          </p:nvPr>
+        </p:nvSpPr>
+        <p:spPr>
+          <a:xfrm>
+            <a:off x="685800" y="4343400"/>
+            <a:ext cx="5486400" cy="4114800"/>
+          </a:xfrm>
+          <a:prstGeom prst="rect">
+            <a:avLst/>
+          </a:prstGeom>
+        </p:spPr>
+        <p:txBody>
+          <a:bodyPr vert="horz" lIns="91440" tIns="45720" rIns="91440" bIns="45720" rtlCol="0"/>
+          <a:lstStyle/>
+          <a:p>
+            <a:pPr lvl="0"/>
+            <a:r>
+              <a:rPr lang="en-US" smtClean="0"/>
+              <a:t>Click to edit Master text styles</a:t>
+            </a:r>
+          </a:p>
+          <a:p>
+            <a:pPr lvl="1"/>
+            <a:r>
+              <a:rPr lang="en-US" smtClean="0"/>
+              <a:t>Second level</a:t>
+            </a:r>
+          </a:p>
+          <a:p>
+            <a:pPr lvl="2"/>
+            <a:r>
+              <a:rPr lang="en-US" smtClean="0"/>
+              <a:t>Third level</a:t>
+            </a:r>
+          </a:p>
+          <a:p>
+            <a:pPr lvl="3"/>
+            <a:r>
+              <a:rPr lang="en-US" smtClean="0"/>
+              <a:t>Fourth level</a:t>
+            </a:r>
+          </a:p>
+          <a:p>
+            <a:pPr lvl="4"/>
+            <a:r>
+              <a:rPr lang="en-US" smtClean="0"/>
+              <a:t>Fifth level</a:t>
+            </a:r>
+            <a:endParaRPr lang="en-US"/>
+          </a:p>
+        </p:txBody>
+      </p:sp>
+      <p:sp>
+        <p:nvSpPr>
+          <p:cNvPr id="6" name="Footer Placeholder 5"/>
+          <p:cNvSpPr>
+            <a:spLocks noGrp="1"/>
+          </p:cNvSpPr>
+          <p:nvPr>
+            <p:ph type="ftr" sz="quarter" idx="4"/>
+          </p:nvPr>
+        </p:nvSpPr>
+        <p:spPr>
+          <a:xfrm>
+            <a:off x="0" y="8685213"/>
+            <a:ext cx="2971800" cy="457200"/>
+          </a:xfrm>
+          <a:prstGeom prst="rect">
+            <a:avLst/>
+          </a:prstGeom>
+        </p:spPr>
+        <p:txBody>
+          <a:bodyPr vert="horz" lIns="91440" tIns="45720" rIns="91440" bIns="45720" rtlCol="0" anchor="b"/>
+          <a:lstStyle>
+            <a:lvl1pPr algn="l">
+              <a:defRPr sz="1200"/>
+            </a:lvl1pPr>
+          </a:lstStyle>
+          <a:p>
+            <a:endParaRPr lang="en-US"/>
+          </a:p>
+        </p:txBody>
+      </p:sp>
+      <p:sp>
+        <p:nvSpPr>
+          <p:cNvPr id="7" name="Slide Number Placeholder 6"/>
+          <p:cNvSpPr>
+            <a:spLocks noGrp="1"/>
+          </p:cNvSpPr>
+          <p:nvPr>
+            <p:ph type="sldNum" sz="quarter" idx="5"/>
+          </p:nvPr>
+        </p:nvSpPr>
+        <p:spPr>
+          <a:xfrm>
+            <a:off x="3884613" y="8685213"/>
+            <a:ext cx="2971800" cy="457200"/>
+          </a:xfrm>
+          <a:prstGeom prst="rect">
+            <a:avLst/>
+          </a:prstGeom>
+        </p:spPr>
+        <p:txBody>
+          <a:bodyPr vert="horz" lIns="91440" tIns="45720" rIns="91440" bIns="45720" rtlCol="0" anchor="b"/>
+          <a:lstStyle>
+            <a:lvl1pPr algn="r">
+              <a:defRPr sz="1200"/>
+            </a:lvl1pPr>
+          </a:lstStyle>
+          <a:p>
+            <a:fld id="{BB5E49A5-4136-284D-997B-48E1D791AD67}" type="slidenum">
+              <a:rPr lang="en-US" smtClean="0"/>
+              <a:t>‹#›</a:t>
+            </a:fld>
+            <a:endParaRPr lang="en-US"/>
+          </a:p>
+        </p:txBody>
+      </p:sp>
+    </p:spTree>
+    <p:extLst>
+      <p:ext uri="{BB962C8B-B14F-4D97-AF65-F5344CB8AC3E}">
+        <p14:creationId xmlns:p14="http://schemas.microsoft.com/office/powerpoint/2010/main" val="2623252185"/>
+      </p:ext>
+    </p:extLst>
+  </p:cSld>
+  <p:clrMap bg1="lt1" tx1="dk1" bg2="lt2" tx2="dk2" accent1="accent1" accent2="accent2" accent3="accent3" accent4="accent4" accent5="accent5" accent6="accent6" hlink="hlink" folHlink="folHlink"/>
+  <p:notesStyle>
+    <a:lvl1pPr marL="0" algn="l" defTabSz="457200" rtl="0" eaLnBrk="1" latinLnBrk="0" hangingPunct="1">
+      <a:defRPr sz="1200" kern="1200">
+        <a:solidFill>
+          <a:schemeClr val="tx1"/>
+        </a:solidFill>
+        <a:latin typeface="+mn-lt"/>
+        <a:ea typeface="+mn-ea"/>
+        <a:cs typeface="+mn-cs"/>
+      </a:defRPr>
+    </a:lvl1pPr>
+    <a:lvl2pPr marL="457200" algn="l" defTabSz="457200" rtl="0" eaLnBrk="1" latinLnBrk="0" hangingPunct="1">
+      <a:defRPr sz="1200" kern="1200">
+        <a:solidFill>
+          <a:schemeClr val="tx1"/>
+        </a:solidFill>
+        <a:latin typeface="+mn-lt"/>
+        <a:ea typeface="+mn-ea"/>
+        <a:cs typeface="+mn-cs"/>
+      </a:defRPr>
+    </a:lvl2pPr>
+    <a:lvl3pPr marL="914400" algn="l" defTabSz="457200" rtl="0" eaLnBrk="1" latinLnBrk="0" hangingPunct="1">
+      <a:defRPr sz="1200" kern="1200">
+        <a:solidFill>
+          <a:schemeClr val="tx1"/>
+        </a:solidFill>
+        <a:latin typeface="+mn-lt"/>
+        <a:ea typeface="+mn-ea"/>
+        <a:cs typeface="+mn-cs"/>
+      </a:defRPr>
+    </a:lvl3pPr>
+    <a:lvl4pPr marL="1371600" algn="l" defTabSz="457200" rtl="0" eaLnBrk="1" latinLnBrk="0" hangingPunct="1">
+      <a:defRPr sz="1200" kern="1200">
+        <a:solidFill>
+          <a:schemeClr val="tx1"/>
+        </a:solidFill>
+        <a:latin typeface="+mn-lt"/>
+        <a:ea typeface="+mn-ea"/>
+        <a:cs typeface="+mn-cs"/>
+      </a:defRPr>
+    </a:lvl4pPr>
+    <a:lvl5pPr marL="1828800" algn="l" defTabSz="457200" rtl="0" eaLnBrk="1" latinLnBrk="0" hangingPunct="1">
+      <a:defRPr sz="1200" kern="1200">
+        <a:solidFill>
+          <a:schemeClr val="tx1"/>
+        </a:solidFill>
+        <a:latin typeface="+mn-lt"/>
+        <a:ea typeface="+mn-ea"/>
+        <a:cs typeface="+mn-cs"/>
+      </a:defRPr>
+    </a:lvl5pPr>
+    <a:lvl6pPr marL="2286000" algn="l" defTabSz="457200" rtl="0" eaLnBrk="1" latinLnBrk="0" hangingPunct="1">
+      <a:defRPr sz="1200" kern="1200">
+        <a:solidFill>
+          <a:schemeClr val="tx1"/>
+        </a:solidFill>
+        <a:latin typeface="+mn-lt"/>
+        <a:ea typeface="+mn-ea"/>
+        <a:cs typeface="+mn-cs"/>
+      </a:defRPr>
+    </a:lvl6pPr>
+    <a:lvl7pPr marL="2743200" algn="l" defTabSz="457200" rtl="0" eaLnBrk="1" latinLnBrk="0" hangingPunct="1">
+      <a:defRPr sz="1200" kern="1200">
+        <a:solidFill>
+          <a:schemeClr val="tx1"/>
+        </a:solidFill>
+        <a:latin typeface="+mn-lt"/>
+        <a:ea typeface="+mn-ea"/>
+        <a:cs typeface="+mn-cs"/>
+      </a:defRPr>
+    </a:lvl7pPr>
+    <a:lvl8pPr marL="3200400" algn="l" defTabSz="457200" rtl="0" eaLnBrk="1" latinLnBrk="0" hangingPunct="1">
+      <a:defRPr sz="1200" kern="1200">
+        <a:solidFill>
+          <a:schemeClr val="tx1"/>
+        </a:solidFill>
+        <a:latin typeface="+mn-lt"/>
+        <a:ea typeface="+mn-ea"/>
+        <a:cs typeface="+mn-cs"/>
+      </a:defRPr>
+    </a:lvl8pPr>
+    <a:lvl9pPr marL="3657600" algn="l" defTabSz="457200" rtl="0" eaLnBrk="1" latinLnBrk="0" hangingPunct="1">
+      <a:defRPr sz="1200" kern="1200">
+        <a:solidFill>
+          <a:schemeClr val="tx1"/>
+        </a:solidFill>
+        <a:latin typeface="+mn-lt"/>
+        <a:ea typeface="+mn-ea"/>
+        <a:cs typeface="+mn-cs"/>
+      </a:defRPr>
+    </a:lvl9pPr>
+  </p:notesStyle>
+</p:notesMaster>
+</file>
+
+<file path=ppt/notesSlides/notesSlide1.xml><?xml version="1.0" encoding="utf-8"?>
+<p:notes xmlns:a="http://schemas.openxmlformats.org/drawingml/2006/main" xmlns:p="http://schemas.openxmlformats.org/presentationml/2006/main" xmlns:r="http://schemas.openxmlformats.org/officeDocument/2006/relationships">
+  <p:cSld>
+    <p:spTree>
+      <p:nvGrpSpPr>
+        <p:cNvPr id="1" name=""/>
+        <p:cNvGrpSpPr/>
+        <p:nvPr/>
+      </p:nvGrpSpPr>
+      <p:grpSpPr>
+        <a:xfrm>
+          <a:off x="0" y="0"/>
+          <a:ext cx="0" cy="0"/>
+          <a:chOff x="0" y="0"/>
+          <a:chExt cx="0" cy="0"/>
+        </a:xfrm>
+      </p:grpSpPr>
+      <p:sp>
+        <p:nvSpPr>
+          <p:cNvPr id="2" name="Slide Image Placeholder 1"/>
+          <p:cNvSpPr>
+            <a:spLocks noGrp="1"/>
+          </p:cNvSpPr>
+          <p:nvPr>
+            <p:ph type="sldImg" idx="2"/>
+          </p:nvPr>
+        </p:nvSpPr>
+        <p:spPr/>
+      </p:sp>
+      <p:sp>
+        <p:nvSpPr>
+          <p:cNvPr id="3" name="Notes Placeholder 2"/>
+          <p:cNvSpPr>
+            <a:spLocks noGrp="1"/>
+          </p:cNvSpPr>
+          <p:nvPr>
+            <p:ph type="body" idx="3" sz="quarter"/>
+          </p:nvPr>
+        </p:nvSpPr>
+        <p:spPr/>
+        <p:txBody>
+          <a:bodyPr/>
+          <a:lstStyle/>
+          <a:p>
+            <a:r>
+              <a:t>开场：主持人介绍发布会流程，总时长约 45 分钟。记得播放暖场视频。</a:t>
+            </a:r>
+          </a:p>
+        </p:txBody>
+      </p:sp>
+      <p:sp>
+        <p:nvSpPr>
+          <p:cNvPr id="4" name="Slide Number Placeholder 3"/>
+          <p:cNvSpPr>
+            <a:spLocks noGrp="1"/>
+          </p:cNvSpPr>
+          <p:nvPr>
+            <p:ph type="sldNum" idx="5" sz="quarter"/>
+          </p:nvPr>
+        </p:nvSpPr>
+        <p:spPr/>
+      </p:sp>
+    </p:spTree>
+  </p:cSld>
+  <p:clrMapOvr>
+    <a:masterClrMapping/>
+  </p:clrMapOvr>
+</p:notes>
+</file>
+
+<file path=ppt/notesSlides/notesSlide2.xml><?xml version="1.0" encoding="utf-8"?>
+<p:notes xmlns:a="http://schemas.openxmlformats.org/drawingml/2006/main" xmlns:p="http://schemas.openxmlformats.org/presentationml/2006/main" xmlns:r="http://schemas.openxmlformats.org/officeDocument/2006/relationships">
+  <p:cSld>
+    <p:spTree>
+      <p:nvGrpSpPr>
+        <p:cNvPr id="1" name=""/>
+        <p:cNvGrpSpPr/>
+        <p:nvPr/>
+      </p:nvGrpSpPr>
+      <p:grpSpPr>
+        <a:xfrm>
+          <a:off x="0" y="0"/>
+          <a:ext cx="0" cy="0"/>
+          <a:chOff x="0" y="0"/>
+          <a:chExt cx="0" cy="0"/>
+        </a:xfrm>
+      </p:grpSpPr>
+      <p:sp>
+        <p:nvSpPr>
+          <p:cNvPr id="2" name="Slide Image Placeholder 1"/>
+          <p:cNvSpPr>
+            <a:spLocks noGrp="1"/>
+          </p:cNvSpPr>
+          <p:nvPr>
+            <p:ph type="sldImg" idx="2"/>
+          </p:nvPr>
+        </p:nvSpPr>
+        <p:spPr/>
+      </p:sp>
+      <p:sp>
+        <p:nvSpPr>
+          <p:cNvPr id="3" name="Notes Placeholder 2"/>
+          <p:cNvSpPr>
+            <a:spLocks noGrp="1"/>
+          </p:cNvSpPr>
+          <p:nvPr>
+            <p:ph type="body" idx="3" sz="quarter"/>
+          </p:nvPr>
+        </p:nvSpPr>
+        <p:spPr/>
+        <p:txBody>
+          <a:bodyPr/>
+          <a:lstStyle/>
+          <a:p>
+            <a:r>
+              <a:t>议程页停留 1 分钟，预告最后有抽奖，留住观众。</a:t>
+            </a:r>
+          </a:p>
+        </p:txBody>
+      </p:sp>
+      <p:sp>
+        <p:nvSpPr>
+          <p:cNvPr id="4" name="Slide Number Placeholder 3"/>
+          <p:cNvSpPr>
+            <a:spLocks noGrp="1"/>
+          </p:cNvSpPr>
+          <p:nvPr>
+            <p:ph type="sldNum" idx="5" sz="quarter"/>
+          </p:nvPr>
+        </p:nvSpPr>
+        <p:spPr/>
+      </p:sp>
+    </p:spTree>
+  </p:cSld>
+  <p:clrMapOvr>
+    <a:masterClrMapping/>
+  </p:clrMapOvr>
+</p:notes>
+</file>
+
+<file path=ppt/notesSlides/notesSlide3.xml><?xml version="1.0" encoding="utf-8"?>
+<p:notes xmlns:a="http://schemas.openxmlformats.org/drawingml/2006/main" xmlns:p="http://schemas.openxmlformats.org/presentationml/2006/main" xmlns:r="http://schemas.openxmlformats.org/officeDocument/2006/relationships">
+  <p:cSld>
+    <p:spTree>
+      <p:nvGrpSpPr>
+        <p:cNvPr id="1" name=""/>
+        <p:cNvGrpSpPr/>
+        <p:nvPr/>
+      </p:nvGrpSpPr>
+      <p:grpSpPr>
+        <a:xfrm>
+          <a:off x="0" y="0"/>
+          <a:ext cx="0" cy="0"/>
+          <a:chOff x="0" y="0"/>
+          <a:chExt cx="0" cy="0"/>
+        </a:xfrm>
+      </p:grpSpPr>
+      <p:sp>
+        <p:nvSpPr>
+          <p:cNvPr id="2" name="Slide Image Placeholder 1"/>
+          <p:cNvSpPr>
+            <a:spLocks noGrp="1"/>
+          </p:cNvSpPr>
+          <p:nvPr>
+            <p:ph type="sldImg" idx="2"/>
+          </p:nvPr>
+        </p:nvSpPr>
+        <p:spPr/>
+      </p:sp>
+      <p:sp>
+        <p:nvSpPr>
+          <p:cNvPr id="3" name="Notes Placeholder 2"/>
+          <p:cNvSpPr>
+            <a:spLocks noGrp="1"/>
+          </p:cNvSpPr>
+          <p:nvPr>
+            <p:ph type="body" idx="3" sz="quarter"/>
+          </p:nvPr>
+        </p:nvSpPr>
+        <p:spPr/>
+        <p:txBody>
+          <a:bodyPr/>
+          <a:lstStyle/>
+          <a:p>
+            <a:r>
+              <a:t>讲三个问卷结论时配合手势，图表数字逐个出现（动画略）。</a:t>
+            </a:r>
+          </a:p>
+        </p:txBody>
+      </p:sp>
+      <p:sp>
+        <p:nvSpPr>
+          <p:cNvPr id="4" name="Slide Number Placeholder 3"/>
+          <p:cNvSpPr>
+            <a:spLocks noGrp="1"/>
+          </p:cNvSpPr>
+          <p:nvPr>
+            <p:ph type="sldNum" idx="5" sz="quarter"/>
+          </p:nvPr>
+        </p:nvSpPr>
+        <p:spPr/>
+      </p:sp>
+    </p:spTree>
+  </p:cSld>
+  <p:clrMapOvr>
+    <a:masterClrMapping/>
+  </p:clrMapOvr>
+</p:notes>
+</file>
+
+<file path=ppt/notesSlides/notesSlide4.xml><?xml version="1.0" encoding="utf-8"?>
+<p:notes xmlns:a="http://schemas.openxmlformats.org/drawingml/2006/main" xmlns:p="http://schemas.openxmlformats.org/presentationml/2006/main" xmlns:r="http://schemas.openxmlformats.org/officeDocument/2006/relationships">
+  <p:cSld>
+    <p:spTree>
+      <p:nvGrpSpPr>
+        <p:cNvPr id="1" name=""/>
+        <p:cNvGrpSpPr/>
+        <p:nvPr/>
+      </p:nvGrpSpPr>
+      <p:grpSpPr>
+        <a:xfrm>
+          <a:off x="0" y="0"/>
+          <a:ext cx="0" cy="0"/>
+          <a:chOff x="0" y="0"/>
+          <a:chExt cx="0" cy="0"/>
+        </a:xfrm>
+      </p:grpSpPr>
+      <p:sp>
+        <p:nvSpPr>
+          <p:cNvPr id="2" name="Slide Image Placeholder 1"/>
+          <p:cNvSpPr>
+            <a:spLocks noGrp="1"/>
+          </p:cNvSpPr>
+          <p:nvPr>
+            <p:ph type="sldImg" idx="2"/>
+          </p:nvPr>
+        </p:nvSpPr>
+        <p:spPr/>
+      </p:sp>
+      <p:sp>
+        <p:nvSpPr>
+          <p:cNvPr id="3" name="Notes Placeholder 2"/>
+          <p:cNvSpPr>
+            <a:spLocks noGrp="1"/>
+          </p:cNvSpPr>
+          <p:nvPr>
+            <p:ph type="body" idx="3" sz="quarter"/>
+          </p:nvPr>
+        </p:nvSpPr>
+        <p:spPr/>
+        <p:txBody>
+          <a:bodyPr/>
+          <a:lstStyle/>
+          <a:p>
+            <a:r>
+              <a:t>每个亮点演示约 5 分钟，提前准备演示账号与脏数据清理。</a:t>
+            </a:r>
+          </a:p>
+        </p:txBody>
+      </p:sp>
+      <p:sp>
+        <p:nvSpPr>
+          <p:cNvPr id="4" name="Slide Number Placeholder 3"/>
+          <p:cNvSpPr>
+            <a:spLocks noGrp="1"/>
+          </p:cNvSpPr>
+          <p:nvPr>
+            <p:ph type="sldNum" idx="5" sz="quarter"/>
+          </p:nvPr>
+        </p:nvSpPr>
+        <p:spPr/>
+      </p:sp>
+    </p:spTree>
+  </p:cSld>
+  <p:clrMapOvr>
+    <a:masterClrMapping/>
+  </p:clrMapOvr>
+</p:notes>
+</file>
+
+<file path=ppt/notesSlides/notesSlide5.xml><?xml version="1.0" encoding="utf-8"?>
+<p:notes xmlns:a="http://schemas.openxmlformats.org/drawingml/2006/main" xmlns:p="http://schemas.openxmlformats.org/presentationml/2006/main" xmlns:r="http://schemas.openxmlformats.org/officeDocument/2006/relationships">
+  <p:cSld>
+    <p:spTree>
+      <p:nvGrpSpPr>
+        <p:cNvPr id="1" name=""/>
+        <p:cNvGrpSpPr/>
+        <p:nvPr/>
+      </p:nvGrpSpPr>
+      <p:grpSpPr>
+        <a:xfrm>
+          <a:off x="0" y="0"/>
+          <a:ext cx="0" cy="0"/>
+          <a:chOff x="0" y="0"/>
+          <a:chExt cx="0" cy="0"/>
+        </a:xfrm>
+      </p:grpSpPr>
+      <p:sp>
+        <p:nvSpPr>
+          <p:cNvPr id="2" name="Slide Image Placeholder 1"/>
+          <p:cNvSpPr>
+            <a:spLocks noGrp="1"/>
+          </p:cNvSpPr>
+          <p:nvPr>
+            <p:ph type="sldImg" idx="2"/>
+          </p:nvPr>
+        </p:nvSpPr>
+        <p:spPr/>
+      </p:sp>
+      <p:sp>
+        <p:nvSpPr>
+          <p:cNvPr id="3" name="Notes Placeholder 2"/>
+          <p:cNvSpPr>
+            <a:spLocks noGrp="1"/>
+          </p:cNvSpPr>
+          <p:nvPr>
+            <p:ph type="body" idx="3" sz="quarter"/>
+          </p:nvPr>
+        </p:nvSpPr>
+        <p:spPr/>
+        <p:txBody>
+          <a:bodyPr/>
+          <a:lstStyle/>
+          <a:p>
+            <a:r>
+              <a:t>价格公布后停顿 3 秒，等掌声。随后讲迁移政策打消顾虑。</a:t>
+            </a:r>
+          </a:p>
+        </p:txBody>
+      </p:sp>
+      <p:sp>
+        <p:nvSpPr>
+          <p:cNvPr id="4" name="Slide Number Placeholder 3"/>
+          <p:cNvSpPr>
+            <a:spLocks noGrp="1"/>
+          </p:cNvSpPr>
+          <p:nvPr>
+            <p:ph type="sldNum" idx="5" sz="quarter"/>
+          </p:nvPr>
+        </p:nvSpPr>
+        <p:spPr/>
+      </p:sp>
+    </p:spTree>
+  </p:cSld>
+  <p:clrMapOvr>
+    <a:masterClrMapping/>
+  </p:clrMapOvr>
+</p:notes>
+</file>
+
+<file path=ppt/notesSlides/notesSlide6.xml><?xml version="1.0" encoding="utf-8"?>
+<p:notes xmlns:a="http://schemas.openxmlformats.org/drawingml/2006/main" xmlns:p="http://schemas.openxmlformats.org/presentationml/2006/main" xmlns:r="http://schemas.openxmlformats.org/officeDocument/2006/relationships">
+  <p:cSld>
+    <p:spTree>
+      <p:nvGrpSpPr>
+        <p:cNvPr id="1" name=""/>
+        <p:cNvGrpSpPr/>
+        <p:nvPr/>
+      </p:nvGrpSpPr>
+      <p:grpSpPr>
+        <a:xfrm>
+          <a:off x="0" y="0"/>
+          <a:ext cx="0" cy="0"/>
+          <a:chOff x="0" y="0"/>
+          <a:chExt cx="0" cy="0"/>
+        </a:xfrm>
+      </p:grpSpPr>
+      <p:sp>
+        <p:nvSpPr>
+          <p:cNvPr id="2" name="Slide Image Placeholder 1"/>
+          <p:cNvSpPr>
+            <a:spLocks noGrp="1"/>
+          </p:cNvSpPr>
+          <p:nvPr>
+            <p:ph type="sldImg" idx="2"/>
+          </p:nvPr>
+        </p:nvSpPr>
+        <p:spPr/>
+      </p:sp>
+      <p:sp>
+        <p:nvSpPr>
+          <p:cNvPr id="3" name="Notes Placeholder 2"/>
+          <p:cNvSpPr>
+            <a:spLocks noGrp="1"/>
+          </p:cNvSpPr>
+          <p:nvPr>
+            <p:ph type="body" idx="3" sz="quarter"/>
+          </p:nvPr>
+        </p:nvSpPr>
+        <p:spPr/>
+        <p:txBody>
+          <a:bodyPr/>
+          <a:lstStyle/>
+          <a:p>
+            <a:r>
+              <a:t>结尾抽奖 + 合影，提醒观众填写反馈问卷领取周边。</a:t>
+            </a:r>
+          </a:p>
+        </p:txBody>
+      </p:sp>
+      <p:sp>
+        <p:nvSpPr>
+          <p:cNvPr id="4" name="Slide Number Placeholder 3"/>
+          <p:cNvSpPr>
+            <a:spLocks noGrp="1"/>
+          </p:cNvSpPr>
+          <p:nvPr>
+            <p:ph type="sldNum" idx="5" sz="quarter"/>
+          </p:nvPr>
+        </p:nvSpPr>
+        <p:spPr/>
+      </p:sp>
+    </p:spTree>
+  </p:cSld>
+  <p:clrMapOvr>
+    <a:masterClrMapping/>
+  </p:clrMapOvr>
+</p:notes>
 </file>
 
 <file path=ppt/slideLayouts/slideLayout1.xml><?xml version="1.0" encoding="utf-8"?>
@@ -3081,6 +4000,14 @@
 <file path=ppt/slides/slide1.xml><?xml version="1.0" encoding="utf-8"?>
 <p:sld xmlns:a="http://schemas.openxmlformats.org/drawingml/2006/main" xmlns:p="http://schemas.openxmlformats.org/presentationml/2006/main" xmlns:r="http://schemas.openxmlformats.org/officeDocument/2006/relationships">
   <p:cSld>
+    <p:bg>
+      <p:bgPr>
+        <a:solidFill>
+          <a:srgbClr val="1E2761"/>
+        </a:solidFill>
+        <a:effectLst/>
+      </p:bgPr>
+    </p:bg>
     <p:spTree>
       <p:nvGrpSpPr>
         <p:cNvPr id="1" name=""/>
@@ -3090,42 +4017,2228 @@
       <p:grpSpPr/>
       <p:sp>
         <p:nvSpPr>
-          <p:cNvPr id="2" name="Title 1"/>
-          <p:cNvSpPr>
-            <a:spLocks noGrp="1"/>
-          </p:cNvSpPr>
-          <p:nvPr>
-            <p:ph type="ctrTitle"/>
-          </p:nvPr>
-        </p:nvSpPr>
-        <p:spPr/>
-        <p:txBody>
-          <a:bodyPr/>
-          <a:lstStyle/>
-          <a:p>
-            <a:r>
-              <a:t>测试标题</a:t>
-            </a:r>
-          </a:p>
-        </p:txBody>
-      </p:sp>
-      <p:sp>
-        <p:nvSpPr>
-          <p:cNvPr id="3" name="Subtitle 2"/>
-          <p:cNvSpPr>
-            <a:spLocks noGrp="1"/>
-          </p:cNvSpPr>
-          <p:nvPr>
-            <p:ph type="subTitle" idx="1"/>
-          </p:nvPr>
-        </p:nvSpPr>
-        <p:spPr/>
-        <p:txBody>
-          <a:bodyPr/>
-          <a:lstStyle/>
-          <a:p>
-            <a:r>
-              <a:t>副标题内容</a:t>
+          <p:cNvPr id="2" name="TextBox 1"/>
+          <p:cNvSpPr txBox="1"/>
+          <p:nvPr/>
+        </p:nvSpPr>
+        <p:spPr>
+          <a:xfrm>
+            <a:off x="914400" y="1005840"/>
+            <a:ext cx="10332720" cy="548640"/>
+          </a:xfrm>
+          <a:prstGeom prst="rect">
+            <a:avLst/>
+          </a:prstGeom>
+          <a:noFill/>
+        </p:spPr>
+        <p:txBody>
+          <a:bodyPr wrap="square">
+            <a:spAutoFit/>
+          </a:bodyPr>
+          <a:lstStyle/>
+          <a:p>
+            <a:pPr algn="l">
+              <a:lnSpc>
+                <a:spcPct val="115000"/>
+              </a:lnSpc>
+              <a:spcAft>
+                <a:spcPts val="600"/>
+              </a:spcAft>
+            </a:pPr>
+            <a:r>
+              <a:rPr sz="2000" b="0">
+                <a:solidFill>
+                  <a:srgbClr val="F9E795"/>
+                </a:solidFill>
+                <a:latin typeface="微软雅黑"/>
+              </a:rPr>
+              <a:t>星云协作 NEBULA · 2026 秋季新品发布会</a:t>
+            </a:r>
+          </a:p>
+        </p:txBody>
+      </p:sp>
+      <p:sp>
+        <p:nvSpPr>
+          <p:cNvPr id="3" name="TextBox 2"/>
+          <p:cNvSpPr txBox="1"/>
+          <p:nvPr/>
+        </p:nvSpPr>
+        <p:spPr>
+          <a:xfrm>
+            <a:off x="914400" y="1645920"/>
+            <a:ext cx="10332720" cy="2194560"/>
+          </a:xfrm>
+          <a:prstGeom prst="rect">
+            <a:avLst/>
+          </a:prstGeom>
+          <a:noFill/>
+        </p:spPr>
+        <p:txBody>
+          <a:bodyPr wrap="square">
+            <a:spAutoFit/>
+          </a:bodyPr>
+          <a:lstStyle/>
+          <a:p>
+            <a:pPr algn="l">
+              <a:lnSpc>
+                <a:spcPct val="115000"/>
+              </a:lnSpc>
+              <a:spcAft>
+                <a:spcPts val="1000"/>
+              </a:spcAft>
+            </a:pPr>
+            <a:r>
+              <a:rPr sz="5400" b="1">
+                <a:solidFill>
+                  <a:srgbClr val="FFFFFF"/>
+                </a:solidFill>
+                <a:latin typeface="微软雅黑"/>
+              </a:rPr>
+              <a:t>星云协作 3.0</a:t>
+            </a:r>
+          </a:p>
+          <a:p>
+            <a:pPr algn="l">
+              <a:lnSpc>
+                <a:spcPct val="115000"/>
+              </a:lnSpc>
+              <a:spcAft>
+                <a:spcPts val="1000"/>
+              </a:spcAft>
+            </a:pPr>
+            <a:r>
+              <a:rPr sz="5400" b="1">
+                <a:solidFill>
+                  <a:srgbClr val="FFFFFF"/>
+                </a:solidFill>
+                <a:latin typeface="微软雅黑"/>
+              </a:rPr>
+              <a:t>让每一次协作，都快人一步</a:t>
+            </a:r>
+          </a:p>
+        </p:txBody>
+      </p:sp>
+      <p:sp>
+        <p:nvSpPr>
+          <p:cNvPr id="4" name="TextBox 3"/>
+          <p:cNvSpPr txBox="1"/>
+          <p:nvPr/>
+        </p:nvSpPr>
+        <p:spPr>
+          <a:xfrm>
+            <a:off x="914400" y="4480560"/>
+            <a:ext cx="6400800" cy="1097280"/>
+          </a:xfrm>
+          <a:prstGeom prst="rect">
+            <a:avLst/>
+          </a:prstGeom>
+          <a:noFill/>
+        </p:spPr>
+        <p:txBody>
+          <a:bodyPr wrap="square">
+            <a:spAutoFit/>
+          </a:bodyPr>
+          <a:lstStyle/>
+          <a:p>
+            <a:pPr algn="l">
+              <a:lnSpc>
+                <a:spcPct val="115000"/>
+              </a:lnSpc>
+              <a:spcAft>
+                <a:spcPts val="600"/>
+              </a:spcAft>
+            </a:pPr>
+            <a:r>
+              <a:rPr sz="1800" b="0">
+                <a:solidFill>
+                  <a:srgbClr val="FFFFFF"/>
+                </a:solidFill>
+                <a:latin typeface="微软雅黑"/>
+              </a:rPr>
+              <a:t>全新 AI 会议纪要 · 跨组织空间 · 99.99% 可用性 SLA</a:t>
+            </a:r>
+          </a:p>
+          <a:p>
+            <a:pPr algn="l">
+              <a:lnSpc>
+                <a:spcPct val="115000"/>
+              </a:lnSpc>
+              <a:spcAft>
+                <a:spcPts val="600"/>
+              </a:spcAft>
+            </a:pPr>
+            <a:r>
+              <a:rPr sz="1800" b="0">
+                <a:solidFill>
+                  <a:srgbClr val="FFFFFF"/>
+                </a:solidFill>
+                <a:latin typeface="微软雅黑"/>
+              </a:rPr>
+              <a:t>2026 年 10 月 18 日 · 杭州云栖小镇</a:t>
+            </a:r>
+          </a:p>
+        </p:txBody>
+      </p:sp>
+      <p:sp>
+        <p:nvSpPr>
+          <p:cNvPr id="5" name="Rounded Rectangle 4"/>
+          <p:cNvSpPr/>
+          <p:nvPr/>
+        </p:nvSpPr>
+        <p:spPr>
+          <a:xfrm>
+            <a:off x="8229600" y="4206240"/>
+            <a:ext cx="3017520" cy="1645920"/>
+          </a:xfrm>
+          <a:prstGeom prst="roundRect">
+            <a:avLst/>
+          </a:prstGeom>
+          <a:solidFill>
+            <a:srgbClr val="F96167"/>
+          </a:solidFill>
+          <a:ln>
+            <a:noFill/>
+          </a:ln>
+        </p:spPr>
+        <p:style>
+          <a:lnRef idx="1">
+            <a:schemeClr val="accent1"/>
+          </a:lnRef>
+          <a:fillRef idx="3">
+            <a:schemeClr val="accent1"/>
+          </a:fillRef>
+          <a:effectRef idx="2">
+            <a:schemeClr val="accent1"/>
+          </a:effectRef>
+          <a:fontRef idx="minor">
+            <a:schemeClr val="lt1"/>
+          </a:fontRef>
+        </p:style>
+        <p:txBody>
+          <a:bodyPr rtlCol="0" anchor="ctr" wrap="square" lIns="228600" rIns="228600" tIns="137160"/>
+          <a:lstStyle/>
+          <a:p>
+            <a:pPr algn="ctr">
+              <a:spcAft>
+                <a:spcPts val="800"/>
+              </a:spcAft>
+            </a:pPr>
+            <a:r>
+              <a:rPr sz="2200" b="1">
+                <a:solidFill>
+                  <a:srgbClr val="FFFFFF"/>
+                </a:solidFill>
+                <a:latin typeface="微软雅黑"/>
+              </a:rPr>
+              <a:t>预约内测</a:t>
+            </a:r>
+          </a:p>
+          <a:p>
+            <a:pPr>
+              <a:lnSpc>
+                <a:spcPct val="120000"/>
+              </a:lnSpc>
+            </a:pPr>
+            <a:r>
+              <a:rPr sz="1400">
+                <a:solidFill>
+                  <a:srgbClr val="FFFFFF"/>
+                </a:solidFill>
+                <a:latin typeface="微软雅黑"/>
+              </a:rPr>
+              <a:t>扫码锁定 500 个首批名额
+发布会现场公布价格</a:t>
+            </a:r>
+          </a:p>
+        </p:txBody>
+      </p:sp>
+    </p:spTree>
+  </p:cSld>
+  <p:clrMapOvr>
+    <a:masterClrMapping/>
+  </p:clrMapOvr>
+</p:sld>
+</file>
+
+<file path=ppt/slides/slide2.xml><?xml version="1.0" encoding="utf-8"?>
+<p:sld xmlns:a="http://schemas.openxmlformats.org/drawingml/2006/main" xmlns:p="http://schemas.openxmlformats.org/presentationml/2006/main" xmlns:r="http://schemas.openxmlformats.org/officeDocument/2006/relationships">
+  <p:cSld>
+    <p:spTree>
+      <p:nvGrpSpPr>
+        <p:cNvPr id="1" name=""/>
+        <p:cNvGrpSpPr/>
+        <p:nvPr/>
+      </p:nvGrpSpPr>
+      <p:grpSpPr/>
+      <p:sp>
+        <p:nvSpPr>
+          <p:cNvPr id="2" name="TextBox 1"/>
+          <p:cNvSpPr txBox="1"/>
+          <p:nvPr/>
+        </p:nvSpPr>
+        <p:spPr>
+          <a:xfrm>
+            <a:off x="731520" y="365760"/>
+            <a:ext cx="10698480" cy="822960"/>
+          </a:xfrm>
+          <a:prstGeom prst="rect">
+            <a:avLst/>
+          </a:prstGeom>
+          <a:noFill/>
+        </p:spPr>
+        <p:txBody>
+          <a:bodyPr wrap="square">
+            <a:spAutoFit/>
+          </a:bodyPr>
+          <a:lstStyle/>
+          <a:p>
+            <a:pPr algn="l">
+              <a:lnSpc>
+                <a:spcPct val="115000"/>
+              </a:lnSpc>
+              <a:spcAft>
+                <a:spcPts val="600"/>
+              </a:spcAft>
+            </a:pPr>
+            <a:r>
+              <a:rPr sz="3600" b="1">
+                <a:solidFill>
+                  <a:srgbClr val="1E2761"/>
+                </a:solidFill>
+                <a:latin typeface="微软雅黑"/>
+              </a:rPr>
+              <a:t>今天的三个篇章</a:t>
+            </a:r>
+          </a:p>
+          <a:p>
+            <a:pPr algn="l">
+              <a:lnSpc>
+                <a:spcPct val="115000"/>
+              </a:lnSpc>
+              <a:spcAft>
+                <a:spcPts val="600"/>
+              </a:spcAft>
+            </a:pPr>
+            <a:r>
+              <a:rPr sz="3600" b="1">
+                <a:solidFill>
+                  <a:srgbClr val="1E2761"/>
+                </a:solidFill>
+                <a:latin typeface="微软雅黑"/>
+              </a:rPr>
+              <a:t>AGENDA · 全程约 45 分钟</a:t>
+            </a:r>
+          </a:p>
+        </p:txBody>
+      </p:sp>
+      <p:sp>
+        <p:nvSpPr>
+          <p:cNvPr id="3" name="Rounded Rectangle 2"/>
+          <p:cNvSpPr/>
+          <p:nvPr/>
+        </p:nvSpPr>
+        <p:spPr>
+          <a:xfrm>
+            <a:off x="731520" y="1828800"/>
+            <a:ext cx="3383280" cy="3931920"/>
+          </a:xfrm>
+          <a:prstGeom prst="roundRect">
+            <a:avLst/>
+          </a:prstGeom>
+          <a:solidFill>
+            <a:srgbClr val="F2F4FA"/>
+          </a:solidFill>
+          <a:ln>
+            <a:noFill/>
+          </a:ln>
+        </p:spPr>
+        <p:style>
+          <a:lnRef idx="1">
+            <a:schemeClr val="accent1"/>
+          </a:lnRef>
+          <a:fillRef idx="3">
+            <a:schemeClr val="accent1"/>
+          </a:fillRef>
+          <a:effectRef idx="2">
+            <a:schemeClr val="accent1"/>
+          </a:effectRef>
+          <a:fontRef idx="minor">
+            <a:schemeClr val="lt1"/>
+          </a:fontRef>
+        </p:style>
+        <p:txBody>
+          <a:bodyPr rtlCol="0" anchor="ctr" wrap="square" lIns="228600" rIns="228600" tIns="137160"/>
+          <a:lstStyle/>
+          <a:p>
+            <a:pPr algn="ctr">
+              <a:spcAft>
+                <a:spcPts val="800"/>
+              </a:spcAft>
+            </a:pPr>
+            <a:r>
+              <a:rPr sz="2600" b="1">
+                <a:solidFill>
+                  <a:srgbClr val="1E2761"/>
+                </a:solidFill>
+                <a:latin typeface="微软雅黑"/>
+              </a:rPr>
+              <a:t>01
+看见变化</a:t>
+            </a:r>
+          </a:p>
+          <a:p>
+            <a:pPr>
+              <a:lnSpc>
+                <a:spcPct val="120000"/>
+              </a:lnSpc>
+            </a:pPr>
+            <a:r>
+              <a:rPr sz="1500">
+                <a:solidFill>
+                  <a:srgbClr val="313131"/>
+                </a:solidFill>
+                <a:latin typeface="微软雅黑"/>
+              </a:rPr>
+              <a:t>混合办公 3 年：协作工具的 5 个真实痛点，来自 1200 份问卷。</a:t>
+            </a:r>
+          </a:p>
+        </p:txBody>
+      </p:sp>
+      <p:sp>
+        <p:nvSpPr>
+          <p:cNvPr id="4" name="Rounded Rectangle 3"/>
+          <p:cNvSpPr/>
+          <p:nvPr/>
+        </p:nvSpPr>
+        <p:spPr>
+          <a:xfrm>
+            <a:off x="4389120" y="1828800"/>
+            <a:ext cx="3383280" cy="3931920"/>
+          </a:xfrm>
+          <a:prstGeom prst="roundRect">
+            <a:avLst/>
+          </a:prstGeom>
+          <a:solidFill>
+            <a:srgbClr val="F2F4FA"/>
+          </a:solidFill>
+          <a:ln>
+            <a:noFill/>
+          </a:ln>
+        </p:spPr>
+        <p:style>
+          <a:lnRef idx="1">
+            <a:schemeClr val="accent1"/>
+          </a:lnRef>
+          <a:fillRef idx="3">
+            <a:schemeClr val="accent1"/>
+          </a:fillRef>
+          <a:effectRef idx="2">
+            <a:schemeClr val="accent1"/>
+          </a:effectRef>
+          <a:fontRef idx="minor">
+            <a:schemeClr val="lt1"/>
+          </a:fontRef>
+        </p:style>
+        <p:txBody>
+          <a:bodyPr rtlCol="0" anchor="ctr" wrap="square" lIns="228600" rIns="228600" tIns="137160"/>
+          <a:lstStyle/>
+          <a:p>
+            <a:pPr algn="ctr">
+              <a:spcAft>
+                <a:spcPts val="800"/>
+              </a:spcAft>
+            </a:pPr>
+            <a:r>
+              <a:rPr sz="2600" b="1">
+                <a:solidFill>
+                  <a:srgbClr val="1E2761"/>
+                </a:solidFill>
+                <a:latin typeface="微软雅黑"/>
+              </a:rPr>
+              <a:t>02
+三款亮点</a:t>
+            </a:r>
+          </a:p>
+          <a:p>
+            <a:pPr>
+              <a:lnSpc>
+                <a:spcPct val="120000"/>
+              </a:lnSpc>
+            </a:pPr>
+            <a:r>
+              <a:rPr sz="1500">
+                <a:solidFill>
+                  <a:srgbClr val="313131"/>
+                </a:solidFill>
+                <a:latin typeface="微软雅黑"/>
+              </a:rPr>
+              <a:t>AI 纪要、跨组织空间、离线优先——现场逐一演示。</a:t>
+            </a:r>
+          </a:p>
+        </p:txBody>
+      </p:sp>
+      <p:sp>
+        <p:nvSpPr>
+          <p:cNvPr id="5" name="Rounded Rectangle 4"/>
+          <p:cNvSpPr/>
+          <p:nvPr/>
+        </p:nvSpPr>
+        <p:spPr>
+          <a:xfrm>
+            <a:off x="8046720" y="1828800"/>
+            <a:ext cx="3383280" cy="3931920"/>
+          </a:xfrm>
+          <a:prstGeom prst="roundRect">
+            <a:avLst/>
+          </a:prstGeom>
+          <a:solidFill>
+            <a:srgbClr val="F2F4FA"/>
+          </a:solidFill>
+          <a:ln>
+            <a:noFill/>
+          </a:ln>
+        </p:spPr>
+        <p:style>
+          <a:lnRef idx="1">
+            <a:schemeClr val="accent1"/>
+          </a:lnRef>
+          <a:fillRef idx="3">
+            <a:schemeClr val="accent1"/>
+          </a:fillRef>
+          <a:effectRef idx="2">
+            <a:schemeClr val="accent1"/>
+          </a:effectRef>
+          <a:fontRef idx="minor">
+            <a:schemeClr val="lt1"/>
+          </a:fontRef>
+        </p:style>
+        <p:txBody>
+          <a:bodyPr rtlCol="0" anchor="ctr" wrap="square" lIns="228600" rIns="228600" tIns="137160"/>
+          <a:lstStyle/>
+          <a:p>
+            <a:pPr algn="ctr">
+              <a:spcAft>
+                <a:spcPts val="800"/>
+              </a:spcAft>
+            </a:pPr>
+            <a:r>
+              <a:rPr sz="2600" b="1">
+                <a:solidFill>
+                  <a:srgbClr val="1E2761"/>
+                </a:solidFill>
+                <a:latin typeface="微软雅黑"/>
+              </a:rPr>
+              <a:t>03
+价格与路线</a:t>
+            </a:r>
+          </a:p>
+          <a:p>
+            <a:pPr>
+              <a:lnSpc>
+                <a:spcPct val="120000"/>
+              </a:lnSpc>
+            </a:pPr>
+            <a:r>
+              <a:rPr sz="1500">
+                <a:solidFill>
+                  <a:srgbClr val="313131"/>
+                </a:solidFill>
+                <a:latin typeface="微软雅黑"/>
+              </a:rPr>
+              <a:t>版本定价、迁移政策与未来 12 个月路线图。</a:t>
+            </a:r>
+          </a:p>
+        </p:txBody>
+      </p:sp>
+    </p:spTree>
+  </p:cSld>
+  <p:clrMapOvr>
+    <a:masterClrMapping/>
+  </p:clrMapOvr>
+</p:sld>
+</file>
+
+<file path=ppt/slides/slide3.xml><?xml version="1.0" encoding="utf-8"?>
+<p:sld xmlns:a="http://schemas.openxmlformats.org/drawingml/2006/main" xmlns:p="http://schemas.openxmlformats.org/presentationml/2006/main" xmlns:r="http://schemas.openxmlformats.org/officeDocument/2006/relationships">
+  <p:cSld>
+    <p:spTree>
+      <p:nvGrpSpPr>
+        <p:cNvPr id="1" name=""/>
+        <p:cNvGrpSpPr/>
+        <p:nvPr/>
+      </p:nvGrpSpPr>
+      <p:grpSpPr/>
+      <p:sp>
+        <p:nvSpPr>
+          <p:cNvPr id="2" name="TextBox 1"/>
+          <p:cNvSpPr txBox="1"/>
+          <p:nvPr/>
+        </p:nvSpPr>
+        <p:spPr>
+          <a:xfrm>
+            <a:off x="731520" y="365760"/>
+            <a:ext cx="10698480" cy="822960"/>
+          </a:xfrm>
+          <a:prstGeom prst="rect">
+            <a:avLst/>
+          </a:prstGeom>
+          <a:noFill/>
+        </p:spPr>
+        <p:txBody>
+          <a:bodyPr wrap="square">
+            <a:spAutoFit/>
+          </a:bodyPr>
+          <a:lstStyle/>
+          <a:p>
+            <a:pPr algn="l">
+              <a:lnSpc>
+                <a:spcPct val="115000"/>
+              </a:lnSpc>
+              <a:spcAft>
+                <a:spcPts val="600"/>
+              </a:spcAft>
+            </a:pPr>
+            <a:r>
+              <a:rPr sz="3600" b="1">
+                <a:solidFill>
+                  <a:srgbClr val="1E2761"/>
+                </a:solidFill>
+                <a:latin typeface="微软雅黑"/>
+              </a:rPr>
+              <a:t>市场在快速长大</a:t>
+            </a:r>
+          </a:p>
+          <a:p>
+            <a:pPr algn="l">
+              <a:lnSpc>
+                <a:spcPct val="115000"/>
+              </a:lnSpc>
+              <a:spcAft>
+                <a:spcPts val="600"/>
+              </a:spcAft>
+            </a:pPr>
+            <a:r>
+              <a:rPr sz="3600" b="1">
+                <a:solidFill>
+                  <a:srgbClr val="1E2761"/>
+                </a:solidFill>
+                <a:latin typeface="微软雅黑"/>
+              </a:rPr>
+              <a:t>INSIGHT · 协作 SaaS 市场规模（亿元）</a:t>
+            </a:r>
+          </a:p>
+        </p:txBody>
+      </p:sp>
+      <p:sp>
+        <p:nvSpPr>
+          <p:cNvPr id="3" name="TextBox 2"/>
+          <p:cNvSpPr txBox="1"/>
+          <p:nvPr/>
+        </p:nvSpPr>
+        <p:spPr>
+          <a:xfrm>
+            <a:off x="731520" y="1554480"/>
+            <a:ext cx="4206240" cy="4114800"/>
+          </a:xfrm>
+          <a:prstGeom prst="rect">
+            <a:avLst/>
+          </a:prstGeom>
+          <a:noFill/>
+        </p:spPr>
+        <p:txBody>
+          <a:bodyPr wrap="square">
+            <a:spAutoFit/>
+          </a:bodyPr>
+          <a:lstStyle/>
+          <a:p>
+            <a:pPr algn="l">
+              <a:lnSpc>
+                <a:spcPct val="115000"/>
+              </a:lnSpc>
+              <a:spcAft>
+                <a:spcPts val="600"/>
+              </a:spcAft>
+            </a:pPr>
+            <a:r>
+              <a:rPr sz="2200" b="1">
+                <a:solidFill>
+                  <a:srgbClr val="1E2761"/>
+                </a:solidFill>
+                <a:latin typeface="微软雅黑"/>
+              </a:rPr>
+              <a:t>1200 份问卷的三个结论</a:t>
+            </a:r>
+          </a:p>
+          <a:p>
+            <a:pPr algn="l">
+              <a:lnSpc>
+                <a:spcPct val="115000"/>
+              </a:lnSpc>
+              <a:spcAft>
+                <a:spcPts val="600"/>
+              </a:spcAft>
+            </a:pPr>
+            <a:r>
+              <a:rPr sz="1500" b="0">
+                <a:solidFill>
+                  <a:srgbClr val="313131"/>
+                </a:solidFill>
+                <a:latin typeface="微软雅黑"/>
+              </a:rPr>
+              <a:t>68% 的团队同时用 3 款以上协作工具，切换成本极高。</a:t>
+            </a:r>
+          </a:p>
+          <a:p>
+            <a:pPr algn="l">
+              <a:lnSpc>
+                <a:spcPct val="115000"/>
+              </a:lnSpc>
+              <a:spcAft>
+                <a:spcPts val="600"/>
+              </a:spcAft>
+            </a:pPr>
+            <a:r>
+              <a:rPr sz="1500" b="0">
+                <a:solidFill>
+                  <a:srgbClr val="313131"/>
+                </a:solidFill>
+                <a:latin typeface="微软雅黑"/>
+              </a:rPr>
+              <a:t>会议纪要整理平均耗时 47 分钟，是最痛的环节。</a:t>
+            </a:r>
+          </a:p>
+          <a:p>
+            <a:pPr algn="l">
+              <a:lnSpc>
+                <a:spcPct val="115000"/>
+              </a:lnSpc>
+              <a:spcAft>
+                <a:spcPts val="600"/>
+              </a:spcAft>
+            </a:pPr>
+            <a:r>
+              <a:rPr sz="1500" b="0">
+                <a:solidFill>
+                  <a:srgbClr val="313131"/>
+                </a:solidFill>
+                <a:latin typeface="微软雅黑"/>
+              </a:rPr>
+              <a:t>跨公司协作时，72% 的人被迫用私人微信传文件。</a:t>
+            </a:r>
+          </a:p>
+        </p:txBody>
+      </p:sp>
+      <p:graphicFrame>
+        <p:nvGraphicFramePr>
+          <p:cNvPr id="4" name="Chart 3"/>
+          <p:cNvGraphicFramePr>
+            <a:graphicFrameLocks noGrp="1"/>
+          </p:cNvGraphicFramePr>
+          <p:nvPr/>
+        </p:nvGraphicFramePr>
+        <p:xfrm>
+          <a:off x="5486400" y="1554480"/>
+          <a:ext cx="5760720" cy="4023360"/>
+        </p:xfrm>
+        <a:graphic>
+          <a:graphicData uri="http://schemas.openxmlformats.org/drawingml/2006/chart">
+            <c:chart xmlns:c="http://schemas.openxmlformats.org/drawingml/2006/chart" r:id="rId2"/>
+          </a:graphicData>
+        </a:graphic>
+      </p:graphicFrame>
+      <p:sp>
+        <p:nvSpPr>
+          <p:cNvPr id="5" name="TextBox 4"/>
+          <p:cNvSpPr txBox="1"/>
+          <p:nvPr/>
+        </p:nvSpPr>
+        <p:spPr>
+          <a:xfrm>
+            <a:off x="731520" y="5943600"/>
+            <a:ext cx="10698480" cy="457200"/>
+          </a:xfrm>
+          <a:prstGeom prst="rect">
+            <a:avLst/>
+          </a:prstGeom>
+          <a:noFill/>
+        </p:spPr>
+        <p:txBody>
+          <a:bodyPr wrap="square">
+            <a:spAutoFit/>
+          </a:bodyPr>
+          <a:lstStyle/>
+          <a:p>
+            <a:pPr algn="l">
+              <a:lnSpc>
+                <a:spcPct val="115000"/>
+              </a:lnSpc>
+              <a:spcAft>
+                <a:spcPts val="600"/>
+              </a:spcAft>
+            </a:pPr>
+            <a:r>
+              <a:rPr sz="1100" b="0">
+                <a:solidFill>
+                  <a:srgbClr val="5F6B7A"/>
+                </a:solidFill>
+                <a:latin typeface="微软雅黑"/>
+              </a:rPr>
+              <a:t>数据来源：内部问卷（n=1200）+ 公开研报整理</a:t>
+            </a:r>
+          </a:p>
+        </p:txBody>
+      </p:sp>
+    </p:spTree>
+  </p:cSld>
+  <p:clrMapOvr>
+    <a:masterClrMapping/>
+  </p:clrMapOvr>
+</p:sld>
+</file>
+
+<file path=ppt/slides/slide4.xml><?xml version="1.0" encoding="utf-8"?>
+<p:sld xmlns:a="http://schemas.openxmlformats.org/drawingml/2006/main" xmlns:p="http://schemas.openxmlformats.org/presentationml/2006/main" xmlns:r="http://schemas.openxmlformats.org/officeDocument/2006/relationships">
+  <p:cSld>
+    <p:spTree>
+      <p:nvGrpSpPr>
+        <p:cNvPr id="1" name=""/>
+        <p:cNvGrpSpPr/>
+        <p:nvPr/>
+      </p:nvGrpSpPr>
+      <p:grpSpPr/>
+      <p:sp>
+        <p:nvSpPr>
+          <p:cNvPr id="2" name="TextBox 1"/>
+          <p:cNvSpPr txBox="1"/>
+          <p:nvPr/>
+        </p:nvSpPr>
+        <p:spPr>
+          <a:xfrm>
+            <a:off x="731520" y="365760"/>
+            <a:ext cx="10698480" cy="822960"/>
+          </a:xfrm>
+          <a:prstGeom prst="rect">
+            <a:avLst/>
+          </a:prstGeom>
+          <a:noFill/>
+        </p:spPr>
+        <p:txBody>
+          <a:bodyPr wrap="square">
+            <a:spAutoFit/>
+          </a:bodyPr>
+          <a:lstStyle/>
+          <a:p>
+            <a:pPr algn="l">
+              <a:lnSpc>
+                <a:spcPct val="115000"/>
+              </a:lnSpc>
+              <a:spcAft>
+                <a:spcPts val="600"/>
+              </a:spcAft>
+            </a:pPr>
+            <a:r>
+              <a:rPr sz="3600" b="1">
+                <a:solidFill>
+                  <a:srgbClr val="1E2761"/>
+                </a:solidFill>
+                <a:latin typeface="微软雅黑"/>
+              </a:rPr>
+              <a:t>三大亮点，现场演示</a:t>
+            </a:r>
+          </a:p>
+          <a:p>
+            <a:pPr algn="l">
+              <a:lnSpc>
+                <a:spcPct val="115000"/>
+              </a:lnSpc>
+              <a:spcAft>
+                <a:spcPts val="600"/>
+              </a:spcAft>
+            </a:pPr>
+            <a:r>
+              <a:rPr sz="3600" b="1">
+                <a:solidFill>
+                  <a:srgbClr val="1E2761"/>
+                </a:solidFill>
+                <a:latin typeface="微软雅黑"/>
+              </a:rPr>
+              <a:t>HIGHLIGHTS · 全部可在发布会后即刻试用</a:t>
+            </a:r>
+          </a:p>
+        </p:txBody>
+      </p:sp>
+      <p:sp>
+        <p:nvSpPr>
+          <p:cNvPr id="3" name="Rounded Rectangle 2"/>
+          <p:cNvSpPr/>
+          <p:nvPr/>
+        </p:nvSpPr>
+        <p:spPr>
+          <a:xfrm>
+            <a:off x="731520" y="1828800"/>
+            <a:ext cx="3383280" cy="3931920"/>
+          </a:xfrm>
+          <a:prstGeom prst="roundRect">
+            <a:avLst/>
+          </a:prstGeom>
+          <a:solidFill>
+            <a:srgbClr val="F2F4FA"/>
+          </a:solidFill>
+          <a:ln>
+            <a:noFill/>
+          </a:ln>
+        </p:spPr>
+        <p:style>
+          <a:lnRef idx="1">
+            <a:schemeClr val="accent1"/>
+          </a:lnRef>
+          <a:fillRef idx="3">
+            <a:schemeClr val="accent1"/>
+          </a:fillRef>
+          <a:effectRef idx="2">
+            <a:schemeClr val="accent1"/>
+          </a:effectRef>
+          <a:fontRef idx="minor">
+            <a:schemeClr val="lt1"/>
+          </a:fontRef>
+        </p:style>
+        <p:txBody>
+          <a:bodyPr rtlCol="0" anchor="ctr" wrap="square" lIns="228600" rIns="228600" tIns="137160"/>
+          <a:lstStyle/>
+          <a:p>
+            <a:pPr algn="ctr">
+              <a:spcAft>
+                <a:spcPts val="800"/>
+              </a:spcAft>
+            </a:pPr>
+            <a:r>
+              <a:rPr sz="2000" b="1">
+                <a:solidFill>
+                  <a:srgbClr val="1E2761"/>
+                </a:solidFill>
+                <a:latin typeface="微软雅黑"/>
+              </a:rPr>
+              <a:t>AI 会议纪要</a:t>
+            </a:r>
+          </a:p>
+          <a:p>
+            <a:pPr>
+              <a:lnSpc>
+                <a:spcPct val="120000"/>
+              </a:lnSpc>
+            </a:pPr>
+            <a:r>
+              <a:rPr sz="1300">
+                <a:solidFill>
+                  <a:srgbClr val="313131"/>
+                </a:solidFill>
+                <a:latin typeface="微软雅黑"/>
+              </a:rPr>
+              <a:t>开完会 10 秒出纪要：待办自动@到人，支持 12 种语言互译，准确率 97.3%。</a:t>
+            </a:r>
+          </a:p>
+        </p:txBody>
+      </p:sp>
+      <p:sp>
+        <p:nvSpPr>
+          <p:cNvPr id="4" name="Rounded Rectangle 3"/>
+          <p:cNvSpPr/>
+          <p:nvPr/>
+        </p:nvSpPr>
+        <p:spPr>
+          <a:xfrm>
+            <a:off x="4389120" y="1828800"/>
+            <a:ext cx="3383280" cy="3931920"/>
+          </a:xfrm>
+          <a:prstGeom prst="roundRect">
+            <a:avLst/>
+          </a:prstGeom>
+          <a:solidFill>
+            <a:srgbClr val="F2F4FA"/>
+          </a:solidFill>
+          <a:ln>
+            <a:noFill/>
+          </a:ln>
+        </p:spPr>
+        <p:style>
+          <a:lnRef idx="1">
+            <a:schemeClr val="accent1"/>
+          </a:lnRef>
+          <a:fillRef idx="3">
+            <a:schemeClr val="accent1"/>
+          </a:fillRef>
+          <a:effectRef idx="2">
+            <a:schemeClr val="accent1"/>
+          </a:effectRef>
+          <a:fontRef idx="minor">
+            <a:schemeClr val="lt1"/>
+          </a:fontRef>
+        </p:style>
+        <p:txBody>
+          <a:bodyPr rtlCol="0" anchor="ctr" wrap="square" lIns="228600" rIns="228600" tIns="137160"/>
+          <a:lstStyle/>
+          <a:p>
+            <a:pPr algn="ctr">
+              <a:spcAft>
+                <a:spcPts val="800"/>
+              </a:spcAft>
+            </a:pPr>
+            <a:r>
+              <a:rPr sz="2000" b="1">
+                <a:solidFill>
+                  <a:srgbClr val="1E2761"/>
+                </a:solidFill>
+                <a:latin typeface="微软雅黑"/>
+              </a:rPr>
+              <a:t>跨组织空间</a:t>
+            </a:r>
+          </a:p>
+          <a:p>
+            <a:pPr>
+              <a:lnSpc>
+                <a:spcPct val="120000"/>
+              </a:lnSpc>
+            </a:pPr>
+            <a:r>
+              <a:rPr sz="1300">
+                <a:solidFill>
+                  <a:srgbClr val="313131"/>
+                </a:solidFill>
+                <a:latin typeface="微软雅黑"/>
+              </a:rPr>
+              <a:t>和上下游建共享空间：文件、任务、日程三同步，权限可细到单个文档。</a:t>
+            </a:r>
+          </a:p>
+        </p:txBody>
+      </p:sp>
+      <p:sp>
+        <p:nvSpPr>
+          <p:cNvPr id="5" name="Rounded Rectangle 4"/>
+          <p:cNvSpPr/>
+          <p:nvPr/>
+        </p:nvSpPr>
+        <p:spPr>
+          <a:xfrm>
+            <a:off x="8046720" y="1828800"/>
+            <a:ext cx="3383280" cy="3931920"/>
+          </a:xfrm>
+          <a:prstGeom prst="roundRect">
+            <a:avLst/>
+          </a:prstGeom>
+          <a:solidFill>
+            <a:srgbClr val="F2F4FA"/>
+          </a:solidFill>
+          <a:ln>
+            <a:noFill/>
+          </a:ln>
+        </p:spPr>
+        <p:style>
+          <a:lnRef idx="1">
+            <a:schemeClr val="accent1"/>
+          </a:lnRef>
+          <a:fillRef idx="3">
+            <a:schemeClr val="accent1"/>
+          </a:fillRef>
+          <a:effectRef idx="2">
+            <a:schemeClr val="accent1"/>
+          </a:effectRef>
+          <a:fontRef idx="minor">
+            <a:schemeClr val="lt1"/>
+          </a:fontRef>
+        </p:style>
+        <p:txBody>
+          <a:bodyPr rtlCol="0" anchor="ctr" wrap="square" lIns="228600" rIns="228600" tIns="137160"/>
+          <a:lstStyle/>
+          <a:p>
+            <a:pPr algn="ctr">
+              <a:spcAft>
+                <a:spcPts val="800"/>
+              </a:spcAft>
+            </a:pPr>
+            <a:r>
+              <a:rPr sz="2000" b="1">
+                <a:solidFill>
+                  <a:srgbClr val="1E2761"/>
+                </a:solidFill>
+                <a:latin typeface="微软雅黑"/>
+              </a:rPr>
+              <a:t>离线优先</a:t>
+            </a:r>
+          </a:p>
+          <a:p>
+            <a:pPr>
+              <a:lnSpc>
+                <a:spcPct val="120000"/>
+              </a:lnSpc>
+            </a:pPr>
+            <a:r>
+              <a:rPr sz="1300">
+                <a:solidFill>
+                  <a:srgbClr val="313131"/>
+                </a:solidFill>
+                <a:latin typeface="微软雅黑"/>
+              </a:rPr>
+              <a:t>高铁、机舱照样用：弱网秒开，联网后自动合并，多端零冲突。</a:t>
+            </a:r>
+          </a:p>
+        </p:txBody>
+      </p:sp>
+    </p:spTree>
+  </p:cSld>
+  <p:clrMapOvr>
+    <a:masterClrMapping/>
+  </p:clrMapOvr>
+</p:sld>
+</file>
+
+<file path=ppt/slides/slide5.xml><?xml version="1.0" encoding="utf-8"?>
+<p:sld xmlns:a="http://schemas.openxmlformats.org/drawingml/2006/main" xmlns:p="http://schemas.openxmlformats.org/presentationml/2006/main" xmlns:r="http://schemas.openxmlformats.org/officeDocument/2006/relationships">
+  <p:cSld>
+    <p:spTree>
+      <p:nvGrpSpPr>
+        <p:cNvPr id="1" name=""/>
+        <p:cNvGrpSpPr/>
+        <p:nvPr/>
+      </p:nvGrpSpPr>
+      <p:grpSpPr/>
+      <p:sp>
+        <p:nvSpPr>
+          <p:cNvPr id="2" name="TextBox 1"/>
+          <p:cNvSpPr txBox="1"/>
+          <p:nvPr/>
+        </p:nvSpPr>
+        <p:spPr>
+          <a:xfrm>
+            <a:off x="731520" y="365760"/>
+            <a:ext cx="10698480" cy="822960"/>
+          </a:xfrm>
+          <a:prstGeom prst="rect">
+            <a:avLst/>
+          </a:prstGeom>
+          <a:noFill/>
+        </p:spPr>
+        <p:txBody>
+          <a:bodyPr wrap="square">
+            <a:spAutoFit/>
+          </a:bodyPr>
+          <a:lstStyle/>
+          <a:p>
+            <a:pPr algn="l">
+              <a:lnSpc>
+                <a:spcPct val="115000"/>
+              </a:lnSpc>
+              <a:spcAft>
+                <a:spcPts val="600"/>
+              </a:spcAft>
+            </a:pPr>
+            <a:r>
+              <a:rPr sz="3600" b="1">
+                <a:solidFill>
+                  <a:srgbClr val="1E2761"/>
+                </a:solidFill>
+                <a:latin typeface="微软雅黑"/>
+              </a:rPr>
+              <a:t>版本与定价</a:t>
+            </a:r>
+          </a:p>
+          <a:p>
+            <a:pPr algn="l">
+              <a:lnSpc>
+                <a:spcPct val="115000"/>
+              </a:lnSpc>
+              <a:spcAft>
+                <a:spcPts val="600"/>
+              </a:spcAft>
+            </a:pPr>
+            <a:r>
+              <a:rPr sz="3600" b="1">
+                <a:solidFill>
+                  <a:srgbClr val="1E2761"/>
+                </a:solidFill>
+                <a:latin typeface="微软雅黑"/>
+              </a:rPr>
+              <a:t>PRICING · 按人按年，老用户续费 8 折</a:t>
+            </a:r>
+          </a:p>
+        </p:txBody>
+      </p:sp>
+      <p:graphicFrame>
+        <p:nvGraphicFramePr>
+          <p:cNvPr id="3" name="Table 2"/>
+          <p:cNvGraphicFramePr>
+            <a:graphicFrameLocks noGrp="1"/>
+          </p:cNvGraphicFramePr>
+          <p:nvPr/>
+        </p:nvGraphicFramePr>
+        <p:xfrm>
+          <a:off x="731520" y="1554480"/>
+          <a:ext cx="10698480" cy="3108960"/>
+        </p:xfrm>
+        <a:graphic>
+          <a:graphicData uri="http://schemas.openxmlformats.org/drawingml/2006/table">
+            <a:tbl>
+              <a:tblPr firstRow="1" bandRow="1">
+                <a:tableStyleId>{5C22544A-7EE6-4342-B048-85BDC9FD1C3A}</a:tableStyleId>
+              </a:tblPr>
+              <a:tblGrid>
+                <a:gridCol w="2377440"/>
+                <a:gridCol w="2743200"/>
+                <a:gridCol w="2926080"/>
+                <a:gridCol w="2651760"/>
+              </a:tblGrid>
+              <a:tr h="518160">
+                <a:tc>
+                  <a:txBody>
+                    <a:bodyPr/>
+                    <a:lstStyle/>
+                    <a:p>
+                      <a:pPr algn="ctr"/>
+                      <a:r>
+                        <a:rPr sz="1400" b="1">
+                          <a:solidFill>
+                            <a:srgbClr val="FFFFFF"/>
+                          </a:solidFill>
+                          <a:latin typeface="微软雅黑"/>
+                        </a:rPr>
+                        <a:t>版本</a:t>
+                      </a:r>
+                    </a:p>
+                  </a:txBody>
+                  <a:tcPr>
+                    <a:solidFill>
+                      <a:srgbClr val="1E2761"/>
+                    </a:solidFill>
+                  </a:tcPr>
+                </a:tc>
+                <a:tc>
+                  <a:txBody>
+                    <a:bodyPr/>
+                    <a:lstStyle/>
+                    <a:p>
+                      <a:pPr algn="ctr"/>
+                      <a:r>
+                        <a:rPr sz="1400" b="1">
+                          <a:solidFill>
+                            <a:srgbClr val="FFFFFF"/>
+                          </a:solidFill>
+                          <a:latin typeface="微软雅黑"/>
+                        </a:rPr>
+                        <a:t>免费版</a:t>
+                      </a:r>
+                    </a:p>
+                  </a:txBody>
+                  <a:tcPr>
+                    <a:solidFill>
+                      <a:srgbClr val="1E2761"/>
+                    </a:solidFill>
+                  </a:tcPr>
+                </a:tc>
+                <a:tc>
+                  <a:txBody>
+                    <a:bodyPr/>
+                    <a:lstStyle/>
+                    <a:p>
+                      <a:pPr algn="ctr"/>
+                      <a:r>
+                        <a:rPr sz="1400" b="1">
+                          <a:solidFill>
+                            <a:srgbClr val="FFFFFF"/>
+                          </a:solidFill>
+                          <a:latin typeface="微软雅黑"/>
+                        </a:rPr>
+                        <a:t>专业版 ★</a:t>
+                      </a:r>
+                    </a:p>
+                  </a:txBody>
+                  <a:tcPr>
+                    <a:solidFill>
+                      <a:srgbClr val="1E2761"/>
+                    </a:solidFill>
+                  </a:tcPr>
+                </a:tc>
+                <a:tc>
+                  <a:txBody>
+                    <a:bodyPr/>
+                    <a:lstStyle/>
+                    <a:p>
+                      <a:pPr algn="ctr"/>
+                      <a:r>
+                        <a:rPr sz="1400" b="1">
+                          <a:solidFill>
+                            <a:srgbClr val="FFFFFF"/>
+                          </a:solidFill>
+                          <a:latin typeface="微软雅黑"/>
+                        </a:rPr>
+                        <a:t>旗舰版</a:t>
+                      </a:r>
+                    </a:p>
+                  </a:txBody>
+                  <a:tcPr>
+                    <a:solidFill>
+                      <a:srgbClr val="1E2761"/>
+                    </a:solidFill>
+                  </a:tcPr>
+                </a:tc>
+              </a:tr>
+              <a:tr h="518160">
+                <a:tc>
+                  <a:txBody>
+                    <a:bodyPr/>
+                    <a:lstStyle/>
+                    <a:p>
+                      <a:pPr algn="ctr"/>
+                      <a:r>
+                        <a:rPr sz="1200" b="1">
+                          <a:solidFill>
+                            <a:srgbClr val="1E2761"/>
+                          </a:solidFill>
+                          <a:latin typeface="微软雅黑"/>
+                        </a:rPr>
+                        <a:t>价格</a:t>
+                      </a:r>
+                    </a:p>
+                  </a:txBody>
+                  <a:tcPr>
+                    <a:solidFill>
+                      <a:srgbClr val="FFFFFF"/>
+                    </a:solidFill>
+                  </a:tcPr>
+                </a:tc>
+                <a:tc>
+                  <a:txBody>
+                    <a:bodyPr/>
+                    <a:lstStyle/>
+                    <a:p>
+                      <a:pPr algn="ctr"/>
+                      <a:r>
+                        <a:rPr sz="1200">
+                          <a:solidFill>
+                            <a:srgbClr val="313131"/>
+                          </a:solidFill>
+                          <a:latin typeface="微软雅黑"/>
+                        </a:rPr>
+                        <a:t>¥0</a:t>
+                      </a:r>
+                    </a:p>
+                  </a:txBody>
+                  <a:tcPr>
+                    <a:solidFill>
+                      <a:srgbClr val="FFFFFF"/>
+                    </a:solidFill>
+                  </a:tcPr>
+                </a:tc>
+                <a:tc>
+                  <a:txBody>
+                    <a:bodyPr/>
+                    <a:lstStyle/>
+                    <a:p>
+                      <a:pPr algn="ctr"/>
+                      <a:r>
+                        <a:rPr sz="1200">
+                          <a:solidFill>
+                            <a:srgbClr val="313131"/>
+                          </a:solidFill>
+                          <a:latin typeface="微软雅黑"/>
+                        </a:rPr>
+                        <a:t>¥198 / 人/年</a:t>
+                      </a:r>
+                    </a:p>
+                  </a:txBody>
+                  <a:tcPr>
+                    <a:solidFill>
+                      <a:srgbClr val="FFF3D6"/>
+                    </a:solidFill>
+                  </a:tcPr>
+                </a:tc>
+                <a:tc>
+                  <a:txBody>
+                    <a:bodyPr/>
+                    <a:lstStyle/>
+                    <a:p>
+                      <a:pPr algn="ctr"/>
+                      <a:r>
+                        <a:rPr sz="1200">
+                          <a:solidFill>
+                            <a:srgbClr val="313131"/>
+                          </a:solidFill>
+                          <a:latin typeface="微软雅黑"/>
+                        </a:rPr>
+                        <a:t>¥398 / 人/年</a:t>
+                      </a:r>
+                    </a:p>
+                  </a:txBody>
+                  <a:tcPr>
+                    <a:solidFill>
+                      <a:srgbClr val="FFFFFF"/>
+                    </a:solidFill>
+                  </a:tcPr>
+                </a:tc>
+              </a:tr>
+              <a:tr h="518160">
+                <a:tc>
+                  <a:txBody>
+                    <a:bodyPr/>
+                    <a:lstStyle/>
+                    <a:p>
+                      <a:pPr algn="ctr"/>
+                      <a:r>
+                        <a:rPr sz="1200" b="1">
+                          <a:solidFill>
+                            <a:srgbClr val="1E2761"/>
+                          </a:solidFill>
+                          <a:latin typeface="微软雅黑"/>
+                        </a:rPr>
+                        <a:t>空间上限</a:t>
+                      </a:r>
+                    </a:p>
+                  </a:txBody>
+                  <a:tcPr>
+                    <a:solidFill>
+                      <a:srgbClr val="F2F4FA"/>
+                    </a:solidFill>
+                  </a:tcPr>
+                </a:tc>
+                <a:tc>
+                  <a:txBody>
+                    <a:bodyPr/>
+                    <a:lstStyle/>
+                    <a:p>
+                      <a:pPr algn="ctr"/>
+                      <a:r>
+                        <a:rPr sz="1200">
+                          <a:solidFill>
+                            <a:srgbClr val="313131"/>
+                          </a:solidFill>
+                          <a:latin typeface="微软雅黑"/>
+                        </a:rPr>
+                        <a:t>10 GB</a:t>
+                      </a:r>
+                    </a:p>
+                  </a:txBody>
+                  <a:tcPr>
+                    <a:solidFill>
+                      <a:srgbClr val="F2F4FA"/>
+                    </a:solidFill>
+                  </a:tcPr>
+                </a:tc>
+                <a:tc>
+                  <a:txBody>
+                    <a:bodyPr/>
+                    <a:lstStyle/>
+                    <a:p>
+                      <a:pPr algn="ctr"/>
+                      <a:r>
+                        <a:rPr sz="1200">
+                          <a:solidFill>
+                            <a:srgbClr val="313131"/>
+                          </a:solidFill>
+                          <a:latin typeface="微软雅黑"/>
+                        </a:rPr>
+                        <a:t>1 TB</a:t>
+                      </a:r>
+                    </a:p>
+                  </a:txBody>
+                  <a:tcPr>
+                    <a:solidFill>
+                      <a:srgbClr val="FFF3D6"/>
+                    </a:solidFill>
+                  </a:tcPr>
+                </a:tc>
+                <a:tc>
+                  <a:txBody>
+                    <a:bodyPr/>
+                    <a:lstStyle/>
+                    <a:p>
+                      <a:pPr algn="ctr"/>
+                      <a:r>
+                        <a:rPr sz="1200">
+                          <a:solidFill>
+                            <a:srgbClr val="313131"/>
+                          </a:solidFill>
+                          <a:latin typeface="微软雅黑"/>
+                        </a:rPr>
+                        <a:t>不限量</a:t>
+                      </a:r>
+                    </a:p>
+                  </a:txBody>
+                  <a:tcPr>
+                    <a:solidFill>
+                      <a:srgbClr val="F2F4FA"/>
+                    </a:solidFill>
+                  </a:tcPr>
+                </a:tc>
+              </a:tr>
+              <a:tr h="518160">
+                <a:tc>
+                  <a:txBody>
+                    <a:bodyPr/>
+                    <a:lstStyle/>
+                    <a:p>
+                      <a:pPr algn="ctr"/>
+                      <a:r>
+                        <a:rPr sz="1200" b="1">
+                          <a:solidFill>
+                            <a:srgbClr val="1E2761"/>
+                          </a:solidFill>
+                          <a:latin typeface="微软雅黑"/>
+                        </a:rPr>
+                        <a:t>AI 纪要</a:t>
+                      </a:r>
+                    </a:p>
+                  </a:txBody>
+                  <a:tcPr>
+                    <a:solidFill>
+                      <a:srgbClr val="FFFFFF"/>
+                    </a:solidFill>
+                  </a:tcPr>
+                </a:tc>
+                <a:tc>
+                  <a:txBody>
+                    <a:bodyPr/>
+                    <a:lstStyle/>
+                    <a:p>
+                      <a:pPr algn="ctr"/>
+                      <a:r>
+                        <a:rPr sz="1200">
+                          <a:solidFill>
+                            <a:srgbClr val="313131"/>
+                          </a:solidFill>
+                          <a:latin typeface="微软雅黑"/>
+                        </a:rPr>
+                        <a:t>每月 5 次</a:t>
+                      </a:r>
+                    </a:p>
+                  </a:txBody>
+                  <a:tcPr>
+                    <a:solidFill>
+                      <a:srgbClr val="FFFFFF"/>
+                    </a:solidFill>
+                  </a:tcPr>
+                </a:tc>
+                <a:tc>
+                  <a:txBody>
+                    <a:bodyPr/>
+                    <a:lstStyle/>
+                    <a:p>
+                      <a:pPr algn="ctr"/>
+                      <a:r>
+                        <a:rPr sz="1200">
+                          <a:solidFill>
+                            <a:srgbClr val="313131"/>
+                          </a:solidFill>
+                          <a:latin typeface="微软雅黑"/>
+                        </a:rPr>
+                        <a:t>无限次</a:t>
+                      </a:r>
+                    </a:p>
+                  </a:txBody>
+                  <a:tcPr>
+                    <a:solidFill>
+                      <a:srgbClr val="FFF3D6"/>
+                    </a:solidFill>
+                  </a:tcPr>
+                </a:tc>
+                <a:tc>
+                  <a:txBody>
+                    <a:bodyPr/>
+                    <a:lstStyle/>
+                    <a:p>
+                      <a:pPr algn="ctr"/>
+                      <a:r>
+                        <a:rPr sz="1200">
+                          <a:solidFill>
+                            <a:srgbClr val="313131"/>
+                          </a:solidFill>
+                          <a:latin typeface="微软雅黑"/>
+                        </a:rPr>
+                        <a:t>无限次 + 定制词库</a:t>
+                      </a:r>
+                    </a:p>
+                  </a:txBody>
+                  <a:tcPr>
+                    <a:solidFill>
+                      <a:srgbClr val="FFFFFF"/>
+                    </a:solidFill>
+                  </a:tcPr>
+                </a:tc>
+              </a:tr>
+              <a:tr h="518160">
+                <a:tc>
+                  <a:txBody>
+                    <a:bodyPr/>
+                    <a:lstStyle/>
+                    <a:p>
+                      <a:pPr algn="ctr"/>
+                      <a:r>
+                        <a:rPr sz="1200" b="1">
+                          <a:solidFill>
+                            <a:srgbClr val="1E2761"/>
+                          </a:solidFill>
+                          <a:latin typeface="微软雅黑"/>
+                        </a:rPr>
+                        <a:t>跨组织空间</a:t>
+                      </a:r>
+                    </a:p>
+                  </a:txBody>
+                  <a:tcPr>
+                    <a:solidFill>
+                      <a:srgbClr val="F2F4FA"/>
+                    </a:solidFill>
+                  </a:tcPr>
+                </a:tc>
+                <a:tc>
+                  <a:txBody>
+                    <a:bodyPr/>
+                    <a:lstStyle/>
+                    <a:p>
+                      <a:pPr algn="ctr"/>
+                      <a:r>
+                        <a:rPr sz="1200">
+                          <a:solidFill>
+                            <a:srgbClr val="313131"/>
+                          </a:solidFill>
+                          <a:latin typeface="微软雅黑"/>
+                        </a:rPr>
+                        <a:t>—</a:t>
+                      </a:r>
+                    </a:p>
+                  </a:txBody>
+                  <a:tcPr>
+                    <a:solidFill>
+                      <a:srgbClr val="F2F4FA"/>
+                    </a:solidFill>
+                  </a:tcPr>
+                </a:tc>
+                <a:tc>
+                  <a:txBody>
+                    <a:bodyPr/>
+                    <a:lstStyle/>
+                    <a:p>
+                      <a:pPr algn="ctr"/>
+                      <a:r>
+                        <a:rPr sz="1200">
+                          <a:solidFill>
+                            <a:srgbClr val="313131"/>
+                          </a:solidFill>
+                          <a:latin typeface="微软雅黑"/>
+                        </a:rPr>
+                        <a:t>5 个</a:t>
+                      </a:r>
+                    </a:p>
+                  </a:txBody>
+                  <a:tcPr>
+                    <a:solidFill>
+                      <a:srgbClr val="FFF3D6"/>
+                    </a:solidFill>
+                  </a:tcPr>
+                </a:tc>
+                <a:tc>
+                  <a:txBody>
+                    <a:bodyPr/>
+                    <a:lstStyle/>
+                    <a:p>
+                      <a:pPr algn="ctr"/>
+                      <a:r>
+                        <a:rPr sz="1200">
+                          <a:solidFill>
+                            <a:srgbClr val="313131"/>
+                          </a:solidFill>
+                          <a:latin typeface="微软雅黑"/>
+                        </a:rPr>
+                        <a:t>不限 + 审计日志</a:t>
+                      </a:r>
+                    </a:p>
+                  </a:txBody>
+                  <a:tcPr>
+                    <a:solidFill>
+                      <a:srgbClr val="F2F4FA"/>
+                    </a:solidFill>
+                  </a:tcPr>
+                </a:tc>
+              </a:tr>
+              <a:tr h="518160">
+                <a:tc>
+                  <a:txBody>
+                    <a:bodyPr/>
+                    <a:lstStyle/>
+                    <a:p>
+                      <a:pPr algn="ctr"/>
+                      <a:r>
+                        <a:rPr sz="1200" b="1">
+                          <a:solidFill>
+                            <a:srgbClr val="1E2761"/>
+                          </a:solidFill>
+                          <a:latin typeface="微软雅黑"/>
+                        </a:rPr>
+                        <a:t>SLA</a:t>
+                      </a:r>
+                    </a:p>
+                  </a:txBody>
+                  <a:tcPr>
+                    <a:solidFill>
+                      <a:srgbClr val="FFFFFF"/>
+                    </a:solidFill>
+                  </a:tcPr>
+                </a:tc>
+                <a:tc>
+                  <a:txBody>
+                    <a:bodyPr/>
+                    <a:lstStyle/>
+                    <a:p>
+                      <a:pPr algn="ctr"/>
+                      <a:r>
+                        <a:rPr sz="1200">
+                          <a:solidFill>
+                            <a:srgbClr val="313131"/>
+                          </a:solidFill>
+                          <a:latin typeface="微软雅黑"/>
+                        </a:rPr>
+                        <a:t>—</a:t>
+                      </a:r>
+                    </a:p>
+                  </a:txBody>
+                  <a:tcPr>
+                    <a:solidFill>
+                      <a:srgbClr val="FFFFFF"/>
+                    </a:solidFill>
+                  </a:tcPr>
+                </a:tc>
+                <a:tc>
+                  <a:txBody>
+                    <a:bodyPr/>
+                    <a:lstStyle/>
+                    <a:p>
+                      <a:pPr algn="ctr"/>
+                      <a:r>
+                        <a:rPr sz="1200">
+                          <a:solidFill>
+                            <a:srgbClr val="313131"/>
+                          </a:solidFill>
+                          <a:latin typeface="微软雅黑"/>
+                        </a:rPr>
+                        <a:t>99.9%</a:t>
+                      </a:r>
+                    </a:p>
+                  </a:txBody>
+                  <a:tcPr>
+                    <a:solidFill>
+                      <a:srgbClr val="FFF3D6"/>
+                    </a:solidFill>
+                  </a:tcPr>
+                </a:tc>
+                <a:tc>
+                  <a:txBody>
+                    <a:bodyPr/>
+                    <a:lstStyle/>
+                    <a:p>
+                      <a:pPr algn="ctr"/>
+                      <a:r>
+                        <a:rPr sz="1200">
+                          <a:solidFill>
+                            <a:srgbClr val="313131"/>
+                          </a:solidFill>
+                          <a:latin typeface="微软雅黑"/>
+                        </a:rPr>
+                        <a:t>99.99% 专属客服</a:t>
+                      </a:r>
+                    </a:p>
+                  </a:txBody>
+                  <a:tcPr>
+                    <a:solidFill>
+                      <a:srgbClr val="FFFFFF"/>
+                    </a:solidFill>
+                  </a:tcPr>
+                </a:tc>
+              </a:tr>
+            </a:tbl>
+          </a:graphicData>
+        </a:graphic>
+      </p:graphicFrame>
+      <p:sp>
+        <p:nvSpPr>
+          <p:cNvPr id="4" name="TextBox 3"/>
+          <p:cNvSpPr txBox="1"/>
+          <p:nvPr/>
+        </p:nvSpPr>
+        <p:spPr>
+          <a:xfrm>
+            <a:off x="731520" y="5029200"/>
+            <a:ext cx="10698480" cy="1097280"/>
+          </a:xfrm>
+          <a:prstGeom prst="rect">
+            <a:avLst/>
+          </a:prstGeom>
+          <a:noFill/>
+        </p:spPr>
+        <p:txBody>
+          <a:bodyPr wrap="square">
+            <a:spAutoFit/>
+          </a:bodyPr>
+          <a:lstStyle/>
+          <a:p>
+            <a:pPr algn="l">
+              <a:lnSpc>
+                <a:spcPct val="115000"/>
+              </a:lnSpc>
+              <a:spcAft>
+                <a:spcPts val="600"/>
+              </a:spcAft>
+            </a:pPr>
+            <a:r>
+              <a:rPr sz="1500" b="0">
+                <a:solidFill>
+                  <a:srgbClr val="313131"/>
+                </a:solidFill>
+                <a:latin typeface="微软雅黑"/>
+              </a:rPr>
+              <a:t>迁移政策：Notion / 飞书 / 钉钉一键导入，100 人以下团队免费协助迁移。</a:t>
+            </a:r>
+          </a:p>
+          <a:p>
+            <a:pPr algn="l">
+              <a:lnSpc>
+                <a:spcPct val="115000"/>
+              </a:lnSpc>
+              <a:spcAft>
+                <a:spcPts val="600"/>
+              </a:spcAft>
+            </a:pPr>
+            <a:r>
+              <a:rPr sz="1500" b="0">
+                <a:solidFill>
+                  <a:srgbClr val="313131"/>
+                </a:solidFill>
+                <a:latin typeface="微软雅黑"/>
+              </a:rPr>
+              <a:t>教育与公益组织全年 5 折。</a:t>
+            </a:r>
+          </a:p>
+        </p:txBody>
+      </p:sp>
+    </p:spTree>
+  </p:cSld>
+  <p:clrMapOvr>
+    <a:masterClrMapping/>
+  </p:clrMapOvr>
+</p:sld>
+</file>
+
+<file path=ppt/slides/slide6.xml><?xml version="1.0" encoding="utf-8"?>
+<p:sld xmlns:a="http://schemas.openxmlformats.org/drawingml/2006/main" xmlns:p="http://schemas.openxmlformats.org/presentationml/2006/main" xmlns:r="http://schemas.openxmlformats.org/officeDocument/2006/relationships">
+  <p:cSld>
+    <p:spTree>
+      <p:nvGrpSpPr>
+        <p:cNvPr id="1" name=""/>
+        <p:cNvGrpSpPr/>
+        <p:nvPr/>
+      </p:nvGrpSpPr>
+      <p:grpSpPr/>
+      <p:sp>
+        <p:nvSpPr>
+          <p:cNvPr id="2" name="TextBox 1"/>
+          <p:cNvSpPr txBox="1"/>
+          <p:nvPr/>
+        </p:nvSpPr>
+        <p:spPr>
+          <a:xfrm>
+            <a:off x="731520" y="365760"/>
+            <a:ext cx="10698480" cy="822960"/>
+          </a:xfrm>
+          <a:prstGeom prst="rect">
+            <a:avLst/>
+          </a:prstGeom>
+          <a:noFill/>
+        </p:spPr>
+        <p:txBody>
+          <a:bodyPr wrap="square">
+            <a:spAutoFit/>
+          </a:bodyPr>
+          <a:lstStyle/>
+          <a:p>
+            <a:pPr algn="l">
+              <a:lnSpc>
+                <a:spcPct val="115000"/>
+              </a:lnSpc>
+              <a:spcAft>
+                <a:spcPts val="600"/>
+              </a:spcAft>
+            </a:pPr>
+            <a:r>
+              <a:rPr sz="3600" b="1">
+                <a:solidFill>
+                  <a:srgbClr val="1E2761"/>
+                </a:solidFill>
+                <a:latin typeface="微软雅黑"/>
+              </a:rPr>
+              <a:t>未来 12 个月</a:t>
+            </a:r>
+          </a:p>
+          <a:p>
+            <a:pPr algn="l">
+              <a:lnSpc>
+                <a:spcPct val="115000"/>
+              </a:lnSpc>
+              <a:spcAft>
+                <a:spcPts val="600"/>
+              </a:spcAft>
+            </a:pPr>
+            <a:r>
+              <a:rPr sz="3600" b="1">
+                <a:solidFill>
+                  <a:srgbClr val="1E2761"/>
+                </a:solidFill>
+                <a:latin typeface="微软雅黑"/>
+              </a:rPr>
+              <a:t>ROADMAP · 今天只是起点</a:t>
+            </a:r>
+          </a:p>
+        </p:txBody>
+      </p:sp>
+      <p:sp>
+        <p:nvSpPr>
+          <p:cNvPr id="3" name="Rounded Rectangle 2"/>
+          <p:cNvSpPr/>
+          <p:nvPr/>
+        </p:nvSpPr>
+        <p:spPr>
+          <a:xfrm>
+            <a:off x="731520" y="1645920"/>
+            <a:ext cx="2606040" cy="2377440"/>
+          </a:xfrm>
+          <a:prstGeom prst="roundRect">
+            <a:avLst/>
+          </a:prstGeom>
+          <a:solidFill>
+            <a:srgbClr val="F2F4FA"/>
+          </a:solidFill>
+          <a:ln>
+            <a:noFill/>
+          </a:ln>
+        </p:spPr>
+        <p:style>
+          <a:lnRef idx="1">
+            <a:schemeClr val="accent1"/>
+          </a:lnRef>
+          <a:fillRef idx="3">
+            <a:schemeClr val="accent1"/>
+          </a:fillRef>
+          <a:effectRef idx="2">
+            <a:schemeClr val="accent1"/>
+          </a:effectRef>
+          <a:fontRef idx="minor">
+            <a:schemeClr val="lt1"/>
+          </a:fontRef>
+        </p:style>
+        <p:txBody>
+          <a:bodyPr rtlCol="0" anchor="ctr" wrap="square" lIns="228600" rIns="228600" tIns="137160"/>
+          <a:lstStyle/>
+          <a:p>
+            <a:pPr algn="ctr">
+              <a:spcAft>
+                <a:spcPts val="800"/>
+              </a:spcAft>
+            </a:pPr>
+            <a:r>
+              <a:rPr sz="2000" b="1">
+                <a:solidFill>
+                  <a:srgbClr val="1E2761"/>
+                </a:solidFill>
+                <a:latin typeface="微软雅黑"/>
+              </a:rPr>
+              <a:t>2026 Q4</a:t>
+            </a:r>
+          </a:p>
+          <a:p>
+            <a:pPr>
+              <a:lnSpc>
+                <a:spcPct val="120000"/>
+              </a:lnSpc>
+            </a:pPr>
+            <a:r>
+              <a:rPr sz="1300">
+                <a:solidFill>
+                  <a:srgbClr val="313131"/>
+                </a:solidFill>
+                <a:latin typeface="微软雅黑"/>
+              </a:rPr>
+              <a:t>开放 API 与 Webhook，上线 50+ 集成。</a:t>
+            </a:r>
+          </a:p>
+        </p:txBody>
+      </p:sp>
+      <p:sp>
+        <p:nvSpPr>
+          <p:cNvPr id="4" name="Rounded Rectangle 3"/>
+          <p:cNvSpPr/>
+          <p:nvPr/>
+        </p:nvSpPr>
+        <p:spPr>
+          <a:xfrm>
+            <a:off x="3520439" y="1645920"/>
+            <a:ext cx="2606040" cy="2377440"/>
+          </a:xfrm>
+          <a:prstGeom prst="roundRect">
+            <a:avLst/>
+          </a:prstGeom>
+          <a:solidFill>
+            <a:srgbClr val="F2F4FA"/>
+          </a:solidFill>
+          <a:ln>
+            <a:noFill/>
+          </a:ln>
+        </p:spPr>
+        <p:style>
+          <a:lnRef idx="1">
+            <a:schemeClr val="accent1"/>
+          </a:lnRef>
+          <a:fillRef idx="3">
+            <a:schemeClr val="accent1"/>
+          </a:fillRef>
+          <a:effectRef idx="2">
+            <a:schemeClr val="accent1"/>
+          </a:effectRef>
+          <a:fontRef idx="minor">
+            <a:schemeClr val="lt1"/>
+          </a:fontRef>
+        </p:style>
+        <p:txBody>
+          <a:bodyPr rtlCol="0" anchor="ctr" wrap="square" lIns="228600" rIns="228600" tIns="137160"/>
+          <a:lstStyle/>
+          <a:p>
+            <a:pPr algn="ctr">
+              <a:spcAft>
+                <a:spcPts val="800"/>
+              </a:spcAft>
+            </a:pPr>
+            <a:r>
+              <a:rPr sz="2000" b="1">
+                <a:solidFill>
+                  <a:srgbClr val="1E2761"/>
+                </a:solidFill>
+                <a:latin typeface="微软雅黑"/>
+              </a:rPr>
+              <a:t>2027 Q1</a:t>
+            </a:r>
+          </a:p>
+          <a:p>
+            <a:pPr>
+              <a:lnSpc>
+                <a:spcPct val="120000"/>
+              </a:lnSpc>
+            </a:pPr>
+            <a:r>
+              <a:rPr sz="1300">
+                <a:solidFill>
+                  <a:srgbClr val="313131"/>
+                </a:solidFill>
+                <a:latin typeface="微软雅黑"/>
+              </a:rPr>
+              <a:t>桌面端 2.0：多窗口与全局搜索。</a:t>
+            </a:r>
+          </a:p>
+        </p:txBody>
+      </p:sp>
+      <p:sp>
+        <p:nvSpPr>
+          <p:cNvPr id="5" name="Rounded Rectangle 4"/>
+          <p:cNvSpPr/>
+          <p:nvPr/>
+        </p:nvSpPr>
+        <p:spPr>
+          <a:xfrm>
+            <a:off x="6309359" y="1645920"/>
+            <a:ext cx="2606040" cy="2377440"/>
+          </a:xfrm>
+          <a:prstGeom prst="roundRect">
+            <a:avLst/>
+          </a:prstGeom>
+          <a:solidFill>
+            <a:srgbClr val="F2F4FA"/>
+          </a:solidFill>
+          <a:ln>
+            <a:noFill/>
+          </a:ln>
+        </p:spPr>
+        <p:style>
+          <a:lnRef idx="1">
+            <a:schemeClr val="accent1"/>
+          </a:lnRef>
+          <a:fillRef idx="3">
+            <a:schemeClr val="accent1"/>
+          </a:fillRef>
+          <a:effectRef idx="2">
+            <a:schemeClr val="accent1"/>
+          </a:effectRef>
+          <a:fontRef idx="minor">
+            <a:schemeClr val="lt1"/>
+          </a:fontRef>
+        </p:style>
+        <p:txBody>
+          <a:bodyPr rtlCol="0" anchor="ctr" wrap="square" lIns="228600" rIns="228600" tIns="137160"/>
+          <a:lstStyle/>
+          <a:p>
+            <a:pPr algn="ctr">
+              <a:spcAft>
+                <a:spcPts val="800"/>
+              </a:spcAft>
+            </a:pPr>
+            <a:r>
+              <a:rPr sz="2000" b="1">
+                <a:solidFill>
+                  <a:srgbClr val="1E2761"/>
+                </a:solidFill>
+                <a:latin typeface="微软雅黑"/>
+              </a:rPr>
+              <a:t>2027 Q2</a:t>
+            </a:r>
+          </a:p>
+          <a:p>
+            <a:pPr>
+              <a:lnSpc>
+                <a:spcPct val="120000"/>
+              </a:lnSpc>
+            </a:pPr>
+            <a:r>
+              <a:rPr sz="1300">
+                <a:solidFill>
+                  <a:srgbClr val="313131"/>
+                </a:solidFill>
+                <a:latin typeface="微软雅黑"/>
+              </a:rPr>
+              <a:t>出海版：英文、日文数据中心上线。</a:t>
+            </a:r>
+          </a:p>
+        </p:txBody>
+      </p:sp>
+      <p:sp>
+        <p:nvSpPr>
+          <p:cNvPr id="6" name="Rounded Rectangle 5"/>
+          <p:cNvSpPr/>
+          <p:nvPr/>
+        </p:nvSpPr>
+        <p:spPr>
+          <a:xfrm>
+            <a:off x="9098280" y="1645920"/>
+            <a:ext cx="2606040" cy="2377440"/>
+          </a:xfrm>
+          <a:prstGeom prst="roundRect">
+            <a:avLst/>
+          </a:prstGeom>
+          <a:solidFill>
+            <a:srgbClr val="F2F4FA"/>
+          </a:solidFill>
+          <a:ln>
+            <a:noFill/>
+          </a:ln>
+        </p:spPr>
+        <p:style>
+          <a:lnRef idx="1">
+            <a:schemeClr val="accent1"/>
+          </a:lnRef>
+          <a:fillRef idx="3">
+            <a:schemeClr val="accent1"/>
+          </a:fillRef>
+          <a:effectRef idx="2">
+            <a:schemeClr val="accent1"/>
+          </a:effectRef>
+          <a:fontRef idx="minor">
+            <a:schemeClr val="lt1"/>
+          </a:fontRef>
+        </p:style>
+        <p:txBody>
+          <a:bodyPr rtlCol="0" anchor="ctr" wrap="square" lIns="228600" rIns="228600" tIns="137160"/>
+          <a:lstStyle/>
+          <a:p>
+            <a:pPr algn="ctr">
+              <a:spcAft>
+                <a:spcPts val="800"/>
+              </a:spcAft>
+            </a:pPr>
+            <a:r>
+              <a:rPr sz="2000" b="1">
+                <a:solidFill>
+                  <a:srgbClr val="1E2761"/>
+                </a:solidFill>
+                <a:latin typeface="微软雅黑"/>
+              </a:rPr>
+              <a:t>2027 Q3</a:t>
+            </a:r>
+          </a:p>
+          <a:p>
+            <a:pPr>
+              <a:lnSpc>
+                <a:spcPct val="120000"/>
+              </a:lnSpc>
+            </a:pPr>
+            <a:r>
+              <a:rPr sz="1300">
+                <a:solidFill>
+                  <a:srgbClr val="313131"/>
+                </a:solidFill>
+                <a:latin typeface="微软雅黑"/>
+              </a:rPr>
+              <a:t>AI 助手开放平台，支持企业私域知识。</a:t>
+            </a:r>
+          </a:p>
+        </p:txBody>
+      </p:sp>
+      <p:sp>
+        <p:nvSpPr>
+          <p:cNvPr id="7" name="TextBox 6"/>
+          <p:cNvSpPr txBox="1"/>
+          <p:nvPr/>
+        </p:nvSpPr>
+        <p:spPr>
+          <a:xfrm>
+            <a:off x="731520" y="4480560"/>
+            <a:ext cx="10698480" cy="1463040"/>
+          </a:xfrm>
+          <a:prstGeom prst="rect">
+            <a:avLst/>
+          </a:prstGeom>
+          <a:noFill/>
+        </p:spPr>
+        <p:txBody>
+          <a:bodyPr wrap="square">
+            <a:spAutoFit/>
+          </a:bodyPr>
+          <a:lstStyle/>
+          <a:p>
+            <a:pPr algn="l">
+              <a:lnSpc>
+                <a:spcPct val="115000"/>
+              </a:lnSpc>
+              <a:spcAft>
+                <a:spcPts val="600"/>
+              </a:spcAft>
+            </a:pPr>
+            <a:r>
+              <a:rPr sz="3000" b="1">
+                <a:solidFill>
+                  <a:srgbClr val="1E2761"/>
+                </a:solidFill>
+                <a:latin typeface="微软雅黑"/>
+              </a:rPr>
+              <a:t>谢谢观看 · Q&amp;A</a:t>
+            </a:r>
+          </a:p>
+          <a:p>
+            <a:pPr algn="l">
+              <a:lnSpc>
+                <a:spcPct val="115000"/>
+              </a:lnSpc>
+              <a:spcAft>
+                <a:spcPts val="600"/>
+              </a:spcAft>
+            </a:pPr>
+            <a:r>
+              <a:rPr sz="1500" b="0">
+                <a:solidFill>
+                  <a:srgbClr val="5F6B7A"/>
+                </a:solidFill>
+                <a:latin typeface="微软雅黑"/>
+              </a:rPr>
+              <a:t>商务合作：partner@nebula.example.com · 内测申请：nebula.example.com/early-access</a:t>
             </a:r>
           </a:p>
         </p:txBody>
@@ -3456,4 +6569,324 @@
   </a:objectDefaults>
   <a:extraClrSchemeLst/>
 </a:theme>
+</file>
+
+<file path=ppt/theme/theme2.xml><?xml version="1.0" encoding="utf-8"?>
+<a:theme xmlns:a="http://schemas.openxmlformats.org/drawingml/2006/main" name="Office Theme">
+  <a:themeElements>
+    <a:clrScheme name="Office">
+      <a:dk1>
+        <a:sysClr val="windowText" lastClr="000000"/>
+      </a:dk1>
+      <a:lt1>
+        <a:sysClr val="window" lastClr="FFFFFF"/>
+      </a:lt1>
+      <a:dk2>
+        <a:srgbClr val="1F497D"/>
+      </a:dk2>
+      <a:lt2>
+        <a:srgbClr val="EEECE1"/>
+      </a:lt2>
+      <a:accent1>
+        <a:srgbClr val="4F81BD"/>
+      </a:accent1>
+      <a:accent2>
+        <a:srgbClr val="C0504D"/>
+      </a:accent2>
+      <a:accent3>
+        <a:srgbClr val="9BBB59"/>
+      </a:accent3>
+      <a:accent4>
+        <a:srgbClr val="8064A2"/>
+      </a:accent4>
+      <a:accent5>
+        <a:srgbClr val="4BACC6"/>
+      </a:accent5>
+      <a:accent6>
+        <a:srgbClr val="F79646"/>
+      </a:accent6>
+      <a:hlink>
+        <a:srgbClr val="0000FF"/>
+      </a:hlink>
+      <a:folHlink>
+        <a:srgbClr val="800080"/>
+      </a:folHlink>
+    </a:clrScheme>
+    <a:fontScheme name="Office">
+      <a:majorFont>
+        <a:latin typeface="Calibri"/>
+        <a:ea typeface=""/>
+        <a:cs typeface=""/>
+        <a:font script="Jpan" typeface="ＭＳ Ｐゴシック"/>
+        <a:font script="Hang" typeface="맑은 고딕"/>
+        <a:font script="Hans" typeface="宋体"/>
+        <a:font script="Hant" typeface="新細明體"/>
+        <a:font script="Arab" typeface="Times New Roman"/>
+        <a:font script="Hebr" typeface="Times New Roman"/>
+        <a:font script="Thai" typeface="Angsana New"/>
+        <a:font script="Ethi" typeface="Nyala"/>
+        <a:font script="Beng" typeface="Vrinda"/>
+        <a:font script="Gujr" typeface="Shruti"/>
+        <a:font script="Khmr" typeface="MoolBoran"/>
+        <a:font script="Knda" typeface="Tunga"/>
+        <a:font script="Guru" typeface="Raavi"/>
+        <a:font script="Cans" typeface="Euphemia"/>
+        <a:font script="Cher" typeface="Plantagenet Cherokee"/>
+        <a:font script="Yiii" typeface="Microsoft Yi Baiti"/>
+        <a:font script="Tibt" typeface="Microsoft Himalaya"/>
+        <a:font script="Thaa" typeface="MV Boli"/>
+        <a:font script="Deva" typeface="Mangal"/>
+        <a:font script="Telu" typeface="Gautami"/>
+        <a:font script="Taml" typeface="Latha"/>
+        <a:font script="Syrc" typeface="Estrangelo Edessa"/>
+        <a:font script="Orya" typeface="Kalinga"/>
+        <a:font script="Mlym" typeface="Kartika"/>
+        <a:font script="Laoo" typeface="DokChampa"/>
+        <a:font script="Sinh" typeface="Iskoola Pota"/>
+        <a:font script="Mong" typeface="Mongolian Baiti"/>
+        <a:font script="Viet" typeface="Times New Roman"/>
+        <a:font script="Uigh" typeface="Microsoft Uighur"/>
+        <a:font script="Geor" typeface="Sylfaen"/>
+      </a:majorFont>
+      <a:minorFont>
+        <a:latin typeface="Calibri"/>
+        <a:ea typeface=""/>
+        <a:cs typeface=""/>
+        <a:font script="Jpan" typeface="ＭＳ Ｐゴシック"/>
+        <a:font script="Hang" typeface="맑은 고딕"/>
+        <a:font script="Hans" typeface="宋体"/>
+        <a:font script="Hant" typeface="新細明體"/>
+        <a:font script="Arab" typeface="Arial"/>
+        <a:font script="Hebr" typeface="Arial"/>
+        <a:font script="Thai" typeface="Cordia New"/>
+        <a:font script="Ethi" typeface="Nyala"/>
+        <a:font script="Beng" typeface="Vrinda"/>
+        <a:font script="Gujr" typeface="Shruti"/>
+        <a:font script="Khmr" typeface="DaunPenh"/>
+        <a:font script="Knda" typeface="Tunga"/>
+        <a:font script="Guru" typeface="Raavi"/>
+        <a:font script="Cans" typeface="Euphemia"/>
+        <a:font script="Cher" typeface="Plantagenet Cherokee"/>
+        <a:font script="Yiii" typeface="Microsoft Yi Baiti"/>
+        <a:font script="Tibt" typeface="Microsoft Himalaya"/>
+        <a:font script="Thaa" typeface="MV Boli"/>
+        <a:font script="Deva" typeface="Mangal"/>
+        <a:font script="Telu" typeface="Gautami"/>
+        <a:font script="Taml" typeface="Latha"/>
+        <a:font script="Syrc" typeface="Estrangelo Edessa"/>
+        <a:font script="Orya" typeface="Kalinga"/>
+        <a:font script="Mlym" typeface="Kartika"/>
+        <a:font script="Laoo" typeface="DokChampa"/>
+        <a:font script="Sinh" typeface="Iskoola Pota"/>
+        <a:font script="Mong" typeface="Mongolian Baiti"/>
+        <a:font script="Viet" typeface="Arial"/>
+        <a:font script="Uigh" typeface="Microsoft Uighur"/>
+        <a:font script="Geor" typeface="Sylfaen"/>
+      </a:minorFont>
+    </a:fontScheme>
+    <a:fmtScheme name="Office">
+      <a:fillStyleLst>
+        <a:solidFill>
+          <a:schemeClr val="phClr"/>
+        </a:solidFill>
+        <a:gradFill rotWithShape="1">
+          <a:gsLst>
+            <a:gs pos="0">
+              <a:schemeClr val="phClr">
+                <a:tint val="50000"/>
+                <a:satMod val="300000"/>
+              </a:schemeClr>
+            </a:gs>
+            <a:gs pos="35000">
+              <a:schemeClr val="phClr">
+                <a:tint val="37000"/>
+                <a:satMod val="300000"/>
+              </a:schemeClr>
+            </a:gs>
+            <a:gs pos="100000">
+              <a:schemeClr val="phClr">
+                <a:tint val="15000"/>
+                <a:satMod val="350000"/>
+              </a:schemeClr>
+            </a:gs>
+          </a:gsLst>
+          <a:lin ang="16200000" scaled="1"/>
+        </a:gradFill>
+        <a:gradFill rotWithShape="1">
+          <a:gsLst>
+            <a:gs pos="0">
+              <a:schemeClr val="phClr">
+                <a:tint val="100000"/>
+                <a:shade val="100000"/>
+                <a:satMod val="130000"/>
+              </a:schemeClr>
+            </a:gs>
+            <a:gs pos="100000">
+              <a:schemeClr val="phClr">
+                <a:tint val="50000"/>
+                <a:shade val="100000"/>
+                <a:satMod val="350000"/>
+              </a:schemeClr>
+            </a:gs>
+          </a:gsLst>
+          <a:lin ang="16200000" scaled="0"/>
+        </a:gradFill>
+      </a:fillStyleLst>
+      <a:lnStyleLst>
+        <a:ln w="9525" cap="flat" cmpd="sng" algn="ctr">
+          <a:solidFill>
+            <a:schemeClr val="phClr">
+              <a:shade val="95000"/>
+              <a:satMod val="105000"/>
+            </a:schemeClr>
+          </a:solidFill>
+          <a:prstDash val="solid"/>
+        </a:ln>
+        <a:ln w="25400" cap="flat" cmpd="sng" algn="ctr">
+          <a:solidFill>
+            <a:schemeClr val="phClr"/>
+          </a:solidFill>
+          <a:prstDash val="solid"/>
+        </a:ln>
+        <a:ln w="38100" cap="flat" cmpd="sng" algn="ctr">
+          <a:solidFill>
+            <a:schemeClr val="phClr"/>
+          </a:solidFill>
+          <a:prstDash val="solid"/>
+        </a:ln>
+      </a:lnStyleLst>
+      <a:effectStyleLst>
+        <a:effectStyle>
+          <a:effectLst>
+            <a:outerShdw blurRad="40000" dist="20000" dir="5400000" rotWithShape="0">
+              <a:srgbClr val="000000">
+                <a:alpha val="38000"/>
+              </a:srgbClr>
+            </a:outerShdw>
+          </a:effectLst>
+        </a:effectStyle>
+        <a:effectStyle>
+          <a:effectLst>
+            <a:outerShdw blurRad="40000" dist="23000" dir="5400000" rotWithShape="0">
+              <a:srgbClr val="000000">
+                <a:alpha val="35000"/>
+              </a:srgbClr>
+            </a:outerShdw>
+          </a:effectLst>
+        </a:effectStyle>
+        <a:effectStyle>
+          <a:effectLst>
+            <a:outerShdw blurRad="40000" dist="23000" dir="5400000" rotWithShape="0">
+              <a:srgbClr val="000000">
+                <a:alpha val="35000"/>
+              </a:srgbClr>
+            </a:outerShdw>
+          </a:effectLst>
+          <a:scene3d>
+            <a:camera prst="orthographicFront">
+              <a:rot lat="0" lon="0" rev="0"/>
+            </a:camera>
+            <a:lightRig rig="threePt" dir="t">
+              <a:rot lat="0" lon="0" rev="1200000"/>
+            </a:lightRig>
+          </a:scene3d>
+          <a:sp3d>
+            <a:bevelT w="63500" h="25400"/>
+          </a:sp3d>
+        </a:effectStyle>
+      </a:effectStyleLst>
+      <a:bgFillStyleLst>
+        <a:solidFill>
+          <a:schemeClr val="phClr"/>
+        </a:solidFill>
+        <a:gradFill rotWithShape="1">
+          <a:gsLst>
+            <a:gs pos="0">
+              <a:schemeClr val="phClr">
+                <a:tint val="40000"/>
+                <a:satMod val="350000"/>
+              </a:schemeClr>
+            </a:gs>
+            <a:gs pos="40000">
+              <a:schemeClr val="phClr">
+                <a:tint val="45000"/>
+                <a:shade val="99000"/>
+                <a:satMod val="350000"/>
+              </a:schemeClr>
+            </a:gs>
+            <a:gs pos="100000">
+              <a:schemeClr val="phClr">
+                <a:shade val="20000"/>
+                <a:satMod val="255000"/>
+              </a:schemeClr>
+            </a:gs>
+          </a:gsLst>
+          <a:path path="circle">
+            <a:fillToRect l="50000" t="-80000" r="50000" b="180000"/>
+          </a:path>
+        </a:gradFill>
+        <a:gradFill rotWithShape="1">
+          <a:gsLst>
+            <a:gs pos="0">
+              <a:schemeClr val="phClr">
+                <a:tint val="80000"/>
+                <a:satMod val="300000"/>
+              </a:schemeClr>
+            </a:gs>
+            <a:gs pos="100000">
+              <a:schemeClr val="phClr">
+                <a:shade val="30000"/>
+                <a:satMod val="200000"/>
+              </a:schemeClr>
+            </a:gs>
+          </a:gsLst>
+          <a:path path="circle">
+            <a:fillToRect l="50000" t="50000" r="50000" b="50000"/>
+          </a:path>
+        </a:gradFill>
+      </a:bgFillStyleLst>
+    </a:fmtScheme>
+  </a:themeElements>
+  <a:objectDefaults>
+    <a:spDef>
+      <a:spPr/>
+      <a:bodyPr/>
+      <a:lstStyle/>
+      <a:style>
+        <a:lnRef idx="1">
+          <a:schemeClr val="accent1"/>
+        </a:lnRef>
+        <a:fillRef idx="3">
+          <a:schemeClr val="accent1"/>
+        </a:fillRef>
+        <a:effectRef idx="2">
+          <a:schemeClr val="accent1"/>
+        </a:effectRef>
+        <a:fontRef idx="minor">
+          <a:schemeClr val="lt1"/>
+        </a:fontRef>
+      </a:style>
+    </a:spDef>
+    <a:lnDef>
+      <a:spPr/>
+      <a:bodyPr/>
+      <a:lstStyle/>
+      <a:style>
+        <a:lnRef idx="2">
+          <a:schemeClr val="accent1"/>
+        </a:lnRef>
+        <a:fillRef idx="0">
+          <a:schemeClr val="accent1"/>
+        </a:fillRef>
+        <a:effectRef idx="1">
+          <a:schemeClr val="accent1"/>
+        </a:effectRef>
+        <a:fontRef idx="minor">
+          <a:schemeClr val="tx1"/>
+        </a:fontRef>
+      </a:style>
+    </a:lnDef>
+  </a:objectDefaults>
+  <a:extraClrSchemeLst/>
+</a:theme>
 </file>